--- a/Topic_D/Exam_Practice/TD-L01_Speaking_Workshop_Learning_Institutions_and_Stages_of_Education.pptx
+++ b/Topic_D/Exam_Practice/TD-L01_Speaking_Workshop_Learning_Institutions_and_Stages_of_Education.pptx
@@ -615,7 +615,11 @@
           <a:lstStyle/>
           <a:p>
             <a:r>
-              <a:rPr lang="en-US" dirty="0"/>
+              <a:rPr lang="ar-SA" dirty="0">
+                <a:latin typeface="Amiri" pitchFamily="2" charset="-78"/>
+                <a:ea typeface="Amiri" pitchFamily="2" charset="-78"/>
+                <a:cs typeface="Amiri" pitchFamily="2" charset="-78"/>
+              </a:rPr>
               <a:t>ROLE PLAY C (Develop) — an exchange visit.
 SET-UP IN THE BREAKOUT ROOM: A = examiner (reads the left column ONLY — the questions, in order), B = candidate (sees the task column; Core may use the help column), C = observer (ticks the feedback checklist). 1 minute preparation, about 3 minutes speaking, 1 minute feedback, then rotate.
 Task ! is the unexpected question: in the exam the candidate has not seen it — the examiner should read it without warning.
@@ -707,7 +711,11 @@
           <a:lstStyle/>
           <a:p>
             <a:r>
-              <a:rPr lang="en-US" dirty="0"/>
+              <a:rPr lang="ar-SA" dirty="0">
+                <a:latin typeface="Amiri" pitchFamily="2" charset="-78"/>
+                <a:ea typeface="Amiri" pitchFamily="2" charset="-78"/>
+                <a:cs typeface="Amiri" pitchFamily="2" charset="-78"/>
+              </a:rPr>
               <a:t>ROLE PLAY D (Stretch) — a radio phone-in.
 SET-UP IN THE BREAKOUT ROOM: A = examiner (reads the left column ONLY — the questions, in order), B = candidate (sees the task column; Core may use the help column), C = observer (ticks the feedback checklist). 1 minute preparation, about 3 minutes speaking, 1 minute feedback, then rotate.
 Task ! is the unexpected question: in the exam the candidate has not seen it — the examiner should read it without warning.
@@ -1243,7 +1251,11 @@
           <a:lstStyle/>
           <a:p>
             <a:r>
-              <a:rPr lang="en-US" dirty="0"/>
+              <a:rPr lang="ar-SA" dirty="0">
+                <a:latin typeface="Amiri" pitchFamily="2" charset="-78"/>
+                <a:ea typeface="Amiri" pitchFamily="2" charset="-78"/>
+                <a:cs typeface="Amiri" pitchFamily="2" charset="-78"/>
+              </a:rPr>
               <a:t>TOPIC CONVERSATION — Core. Examiner asks the questions in order and may add “لِمَاذَا؟ / هَلْ يُمْكِنُ أَنْ تَشْرَحَ أَكْثَرَ؟” to push for more. Candidate aims for one full sentence per question.
 </a:t>
             </a:r>
@@ -1332,7 +1344,11 @@
           <a:lstStyle/>
           <a:p>
             <a:r>
-              <a:rPr lang="en-US" dirty="0"/>
+              <a:rPr lang="ar-SA" dirty="0">
+                <a:latin typeface="Amiri" pitchFamily="2" charset="-78"/>
+                <a:ea typeface="Amiri" pitchFamily="2" charset="-78"/>
+                <a:cs typeface="Amiri" pitchFamily="2" charset="-78"/>
+              </a:rPr>
               <a:t>TOPIC CONVERSATION — Develop. Examiner asks the questions in order and may add “لِمَاذَا؟ / هَلْ يُمْكِنُ أَنْ تَشْرَحَ أَكْثَرَ؟” to push for more. Candidate aims for two or three sentences, with a comparison and a past detail.
 </a:t>
             </a:r>
@@ -1421,7 +1437,11 @@
           <a:lstStyle/>
           <a:p>
             <a:r>
-              <a:rPr lang="en-US" dirty="0"/>
+              <a:rPr lang="ar-SA" dirty="0">
+                <a:latin typeface="Amiri" pitchFamily="2" charset="-78"/>
+                <a:ea typeface="Amiri" pitchFamily="2" charset="-78"/>
+                <a:cs typeface="Amiri" pitchFamily="2" charset="-78"/>
+              </a:rPr>
               <a:t>TOPIC CONVERSATION — Stretch. Examiner asks the questions in order and may add “لِمَاذَا؟ / هَلْ يُمْكِنُ أَنْ تَشْرَحَ أَكْثَرَ؟” to push for more. Candidate aims for a developed answer: opinion, balance, concession and a conditional.
 </a:t>
             </a:r>
@@ -1510,7 +1530,11 @@
           <a:lstStyle/>
           <a:p>
             <a:r>
-              <a:rPr lang="en-US" dirty="0"/>
+              <a:rPr lang="ar-SA" dirty="0">
+                <a:latin typeface="Amiri" pitchFamily="2" charset="-78"/>
+                <a:ea typeface="Amiri" pitchFamily="2" charset="-78"/>
+                <a:cs typeface="Amiri" pitchFamily="2" charset="-78"/>
+              </a:rPr>
               <a:t>WELCOME (1 min) — while students join.
 • Greet each student by name as they arrive: السَّلَامُ عَلَيْكُمْ. Take the register (Pastoral Tracker: attendance 0/1).
 • 2-MINUTE CHECK-IN (SEND training): a private chat to any student who seemed unsettled last lesson — “Are you okay today? 👍 / 👎”.
@@ -2224,7 +2248,11 @@
           <a:lstStyle/>
           <a:p>
             <a:r>
-              <a:rPr lang="en-US" dirty="0"/>
+              <a:rPr lang="ar-SA" dirty="0">
+                <a:latin typeface="Amiri" pitchFamily="2" charset="-78"/>
+                <a:ea typeface="Amiri" pitchFamily="2" charset="-78"/>
+                <a:cs typeface="Amiri" pitchFamily="2" charset="-78"/>
+              </a:rPr>
               <a:t>TEACH (3 min). Role play = precise and complete; conversation = develop. Choral repetition of the repair phrases. To a girl: تُعِيدِي.</a:t>
             </a:r>
             <a:endParaRPr lang="en-US" dirty="0"/>
@@ -2312,7 +2340,11 @@
           <a:lstStyle/>
           <a:p>
             <a:r>
-              <a:rPr lang="en-US" dirty="0"/>
+              <a:rPr lang="ar-SA" dirty="0">
+                <a:latin typeface="Amiri" pitchFamily="2" charset="-78"/>
+                <a:ea typeface="Amiri" pitchFamily="2" charset="-78"/>
+                <a:cs typeface="Amiri" pitchFamily="2" charset="-78"/>
+              </a:rPr>
               <a:t>LANGUAGE BANK (2 min) — nisba adjectives agree: مَدْرَسَةٌ حُكُومِيَّةٌ · مَعْهَدٌ مِهْنِيٌّ · جَامِعَاتٌ بَرِيطَانِيَّةٌ (non-human pl. → f. sg.). Stages: رَوْضَةٌ → ابْتِدَائِيَّةٌ → ثَانَوِيَّةٌ → جَامِعَةٌ.</a:t>
             </a:r>
             <a:endParaRPr lang="en-US" dirty="0"/>
@@ -2400,7 +2432,11 @@
           <a:lstStyle/>
           <a:p>
             <a:r>
-              <a:rPr lang="en-US" dirty="0"/>
+              <a:rPr lang="ar-SA" dirty="0">
+                <a:latin typeface="Amiri" pitchFamily="2" charset="-78"/>
+                <a:ea typeface="Amiri" pitchFamily="2" charset="-78"/>
+                <a:cs typeface="Amiri" pitchFamily="2" charset="-78"/>
+              </a:rPr>
               <a:t>LANGUAGE BANK (2 min) — comparatives never change for gender: المَدْرَسَةُ الخَاصَّةُ أَغْلَى مِنَ الحُكُومِيَّةِ. Contrast: بَيْنَمَا + sentence; أَمَّا فِي … فَـ …</a:t>
             </a:r>
             <a:endParaRPr lang="en-US" dirty="0"/>
@@ -2576,7 +2612,11 @@
           <a:lstStyle/>
           <a:p>
             <a:r>
-              <a:rPr lang="en-US" dirty="0"/>
+              <a:rPr lang="ar-SA" dirty="0">
+                <a:latin typeface="Amiri" pitchFamily="2" charset="-78"/>
+                <a:ea typeface="Amiri" pitchFamily="2" charset="-78"/>
+                <a:cs typeface="Amiri" pitchFamily="2" charset="-78"/>
+              </a:rPr>
               <a:t>ROLE PLAY A (Core) — a school open day.
 SET-UP IN THE BREAKOUT ROOM: A = examiner (reads the left column ONLY — the questions, in order), B = candidate (sees the task column; Core may use the help column), C = observer (ticks the feedback checklist). 1 minute preparation, about 3 minutes speaking, 1 minute feedback, then rotate.
 Task ! is the unexpected question: in the exam the candidate has not seen it — the examiner should read it without warning.
@@ -2668,7 +2708,11 @@
           <a:lstStyle/>
           <a:p>
             <a:r>
-              <a:rPr lang="en-US" dirty="0"/>
+              <a:rPr lang="ar-SA" dirty="0">
+                <a:latin typeface="Amiri" pitchFamily="2" charset="-78"/>
+                <a:ea typeface="Amiri" pitchFamily="2" charset="-78"/>
+                <a:cs typeface="Amiri" pitchFamily="2" charset="-78"/>
+              </a:rPr>
               <a:t>ROLE PLAY B (Core+) — choosing a sixth form.
 SET-UP IN THE BREAKOUT ROOM: A = examiner (reads the left column ONLY — the questions, in order), B = candidate (sees the task column; Core may use the help column), C = observer (ticks the feedback checklist). 1 minute preparation, about 3 minutes speaking, 1 minute feedback, then rotate.
 Task ! is the unexpected question: in the exam the candidate has not seen it — the examiner should read it without warning.
@@ -3156,6 +3200,7 @@
                   <a:srgbClr val="D4AF37"/>
                 </a:solidFill>
                 <a:latin typeface="Amiri" pitchFamily="2" charset="-78"/>
+                <a:ea typeface="Amiri" pitchFamily="2" charset="-78"/>
                 <a:cs typeface="Amiri" pitchFamily="2" charset="-78"/>
               </a:rPr>
               <a:t>م</a:t>
@@ -3362,6 +3407,7 @@
                   <a:srgbClr val="D4AF37"/>
                 </a:solidFill>
                 <a:latin typeface="Amiri" pitchFamily="2" charset="-78"/>
+                <a:ea typeface="Amiri" pitchFamily="2" charset="-78"/>
                 <a:cs typeface="Amiri" pitchFamily="2" charset="-78"/>
               </a:rPr>
               <a:t>وَرْشَةُ التَّحَدُّثِ — مَرَاحِلُ التَّعْلِيمِ</a:t>
@@ -3413,6 +3459,7 @@
                   <a:srgbClr val="C6D2E6"/>
                 </a:solidFill>
                 <a:latin typeface="Amiri" pitchFamily="2" charset="-78"/>
+                <a:ea typeface="Amiri" pitchFamily="2" charset="-78"/>
                 <a:cs typeface="Amiri" pitchFamily="2" charset="-78"/>
               </a:rPr>
               <a:t>أَكْبَرُ مِنْ</a:t>
@@ -3439,6 +3486,7 @@
                   <a:srgbClr val="C6D2E6"/>
                 </a:solidFill>
                 <a:latin typeface="Amiri" pitchFamily="2" charset="-78"/>
+                <a:ea typeface="Amiri" pitchFamily="2" charset="-78"/>
                 <a:cs typeface="Amiri" pitchFamily="2" charset="-78"/>
               </a:rPr>
               <a:t>بَيْنَمَا</a:t>
@@ -3871,6 +3919,7 @@
                   <a:srgbClr val="D4AF37"/>
                 </a:solidFill>
                 <a:latin typeface="Amiri" pitchFamily="2" charset="-78"/>
+                <a:ea typeface="Amiri" pitchFamily="2" charset="-78"/>
                 <a:cs typeface="Amiri" pitchFamily="2" charset="-78"/>
               </a:rPr>
               <a:t>م</a:t>
@@ -4191,6 +4240,7 @@
                   <a:srgbClr val="8A6D1E"/>
                 </a:solidFill>
                 <a:latin typeface="Amiri" pitchFamily="2" charset="-78"/>
+                <a:ea typeface="Amiri" pitchFamily="2" charset="-78"/>
                 <a:cs typeface="Amiri" pitchFamily="2" charset="-78"/>
               </a:rPr>
               <a:t>مَدْرَسَتِي وَمَدْرَسَتُكَ</a:t>
@@ -4471,6 +4521,7 @@
                   <a:srgbClr val="1B3B6F"/>
                 </a:solidFill>
                 <a:latin typeface="Amiri" pitchFamily="2" charset="-78"/>
+                <a:ea typeface="Amiri" pitchFamily="2" charset="-78"/>
                 <a:cs typeface="Amiri" pitchFamily="2" charset="-78"/>
               </a:rPr>
               <a:t>مَدْرَسَتِي … فِيهَا … وَ…</a:t>
@@ -4547,6 +4598,7 @@
                   <a:srgbClr val="1B3B6F"/>
                 </a:solidFill>
                 <a:latin typeface="Amiri" pitchFamily="2" charset="-78"/>
+                <a:ea typeface="Amiri" pitchFamily="2" charset="-78"/>
                 <a:cs typeface="Amiri" pitchFamily="2" charset="-78"/>
               </a:rPr>
               <a:t>صِفْ لِي مَدْرَسَتَكَ.</a:t>
@@ -4650,6 +4702,7 @@
                   <a:srgbClr val="1B3B6F"/>
                 </a:solidFill>
                 <a:latin typeface="Amiri" pitchFamily="2" charset="-78"/>
+                <a:ea typeface="Amiri" pitchFamily="2" charset="-78"/>
                 <a:cs typeface="Amiri" pitchFamily="2" charset="-78"/>
               </a:rPr>
               <a:t>أَمَّا نَحْنُ فَنَبْدَأُ … بَيْنَمَا …</a:t>
@@ -4726,6 +4779,7 @@
                   <a:srgbClr val="1B3B6F"/>
                 </a:solidFill>
                 <a:latin typeface="Amiri" pitchFamily="2" charset="-78"/>
+                <a:ea typeface="Amiri" pitchFamily="2" charset="-78"/>
                 <a:cs typeface="Amiri" pitchFamily="2" charset="-78"/>
               </a:rPr>
               <a:t>فِي الأُرْدُنِّ نَبْدَأُ الدِّرَاسَةَ فِي السَّابِعَةِ وَالنِّصْفِ.</a:t>
@@ -4829,6 +4883,7 @@
                   <a:srgbClr val="1B3B6F"/>
                 </a:solidFill>
                 <a:latin typeface="Amiri" pitchFamily="2" charset="-78"/>
+                <a:ea typeface="Amiri" pitchFamily="2" charset="-78"/>
                 <a:cs typeface="Amiri" pitchFamily="2" charset="-78"/>
               </a:rPr>
               <a:t>كَانَتْ … وَكُنَّا …</a:t>
@@ -4905,6 +4960,7 @@
                   <a:srgbClr val="1B3B6F"/>
                 </a:solidFill>
                 <a:latin typeface="Amiri" pitchFamily="2" charset="-78"/>
+                <a:ea typeface="Amiri" pitchFamily="2" charset="-78"/>
                 <a:cs typeface="Amiri" pitchFamily="2" charset="-78"/>
               </a:rPr>
               <a:t>كَيْفَ كَانَتْ مَدْرَسَتُكَ الابْتِدَائِيَّةُ؟</a:t>
@@ -5008,6 +5064,7 @@
                   <a:srgbClr val="1B3B6F"/>
                 </a:solidFill>
                 <a:latin typeface="Amiri" pitchFamily="2" charset="-78"/>
+                <a:ea typeface="Amiri" pitchFamily="2" charset="-78"/>
                 <a:cs typeface="Amiri" pitchFamily="2" charset="-78"/>
               </a:rPr>
               <a:t>الثَّانَوِيَّةُ أَصْعَبُ، لِأَنَّ … وَلِأَنَّ …</a:t>
@@ -5084,6 +5141,7 @@
                   <a:srgbClr val="1B3B6F"/>
                 </a:solidFill>
                 <a:latin typeface="Amiri" pitchFamily="2" charset="-78"/>
+                <a:ea typeface="Amiri" pitchFamily="2" charset="-78"/>
                 <a:cs typeface="Amiri" pitchFamily="2" charset="-78"/>
               </a:rPr>
               <a:t>أَيُّهُمَا أَصْعَبُ فِي رَأْيِكَ: الابْتِدَائِيَّةُ أَمِ الثَّانَوِيَّةُ؟</a:t>
@@ -5187,6 +5245,7 @@
                   <a:srgbClr val="1B3B6F"/>
                 </a:solidFill>
                 <a:latin typeface="Amiri" pitchFamily="2" charset="-78"/>
+                <a:ea typeface="Amiri" pitchFamily="2" charset="-78"/>
                 <a:cs typeface="Amiri" pitchFamily="2" charset="-78"/>
               </a:rPr>
               <a:t>نَعَمْ، إِذَا سَنَحَتْ لِي الفُرْصَةُ، فَسَأَدْرُسُ …</a:t>
@@ -5263,6 +5322,7 @@
                   <a:srgbClr val="1B3B6F"/>
                 </a:solidFill>
                 <a:latin typeface="Amiri" pitchFamily="2" charset="-78"/>
+                <a:ea typeface="Amiri" pitchFamily="2" charset="-78"/>
                 <a:cs typeface="Amiri" pitchFamily="2" charset="-78"/>
               </a:rPr>
               <a:t>هَلْ تُحِبُّ أَنْ تَدْرُسَ فِي الأُرْدُنِّ؟</a:t>
@@ -5472,6 +5532,7 @@
                   <a:srgbClr val="D4AF37"/>
                 </a:solidFill>
                 <a:latin typeface="Amiri" pitchFamily="2" charset="-78"/>
+                <a:ea typeface="Amiri" pitchFamily="2" charset="-78"/>
                 <a:cs typeface="Amiri" pitchFamily="2" charset="-78"/>
               </a:rPr>
               <a:t>م</a:t>
@@ -5792,6 +5853,7 @@
                   <a:srgbClr val="8A6D1E"/>
                 </a:solidFill>
                 <a:latin typeface="Amiri" pitchFamily="2" charset="-78"/>
+                <a:ea typeface="Amiri" pitchFamily="2" charset="-78"/>
                 <a:cs typeface="Amiri" pitchFamily="2" charset="-78"/>
               </a:rPr>
               <a:t>أَيُّ مَدْرَسَةٍ أَفْضَلُ؟</a:t>
@@ -6072,6 +6134,7 @@
                   <a:srgbClr val="1B3B6F"/>
                 </a:solidFill>
                 <a:latin typeface="Amiri" pitchFamily="2" charset="-78"/>
+                <a:ea typeface="Amiri" pitchFamily="2" charset="-78"/>
                 <a:cs typeface="Amiri" pitchFamily="2" charset="-78"/>
               </a:rPr>
               <a:t>مِنْ نَاحِيَةٍ … وَمِنْ نَاحِيَةٍ أُخْرَى …</a:t>
@@ -6148,6 +6211,7 @@
                   <a:srgbClr val="1B3B6F"/>
                 </a:solidFill>
                 <a:latin typeface="Amiri" pitchFamily="2" charset="-78"/>
+                <a:ea typeface="Amiri" pitchFamily="2" charset="-78"/>
                 <a:cs typeface="Amiri" pitchFamily="2" charset="-78"/>
               </a:rPr>
               <a:t>هَلِ المَدَارِسُ الخَاصَّةُ أَفْضَلُ مِنَ الحُكُومِيَّةِ؟</a:t>
@@ -6251,6 +6315,7 @@
                   <a:srgbClr val="1B3B6F"/>
                 </a:solidFill>
                 <a:latin typeface="Amiri" pitchFamily="2" charset="-78"/>
+                <a:ea typeface="Amiri" pitchFamily="2" charset="-78"/>
                 <a:cs typeface="Amiri" pitchFamily="2" charset="-78"/>
               </a:rPr>
               <a:t>نَعَمْ، انْتَقَلْتُ إِلَيْهَا … لِأَنَّ …</a:t>
@@ -6327,6 +6392,7 @@
                   <a:srgbClr val="1B3B6F"/>
                 </a:solidFill>
                 <a:latin typeface="Amiri" pitchFamily="2" charset="-78"/>
+                <a:ea typeface="Amiri" pitchFamily="2" charset="-78"/>
                 <a:cs typeface="Amiri" pitchFamily="2" charset="-78"/>
               </a:rPr>
               <a:t>وَأَنْتَ تَدْرُسُ فِي مَدْرَسَةٍ إِلِكْتْرُونِيَّةٍ، أَلَيْسَ كَذٰلِكَ؟</a:t>
@@ -6430,6 +6496,7 @@
                   <a:srgbClr val="1B3B6F"/>
                 </a:solidFill>
                 <a:latin typeface="Amiri" pitchFamily="2" charset="-78"/>
+                <a:ea typeface="Amiri" pitchFamily="2" charset="-78"/>
                 <a:cs typeface="Amiri" pitchFamily="2" charset="-78"/>
               </a:rPr>
               <a:t>صَحِيحٌ أَنَّ … غَيْرَ أَنَّ …</a:t>
@@ -6506,6 +6573,7 @@
                   <a:srgbClr val="1B3B6F"/>
                 </a:solidFill>
                 <a:latin typeface="Amiri" pitchFamily="2" charset="-78"/>
+                <a:ea typeface="Amiri" pitchFamily="2" charset="-78"/>
                 <a:cs typeface="Amiri" pitchFamily="2" charset="-78"/>
               </a:rPr>
               <a:t>لٰكِنَّ الطُّلَّابَ يَحْتَاجُونَ إِلَى أَصْدِقَاءَ!</a:t>
@@ -6609,6 +6677,7 @@
                   <a:srgbClr val="1B3B6F"/>
                 </a:solidFill>
                 <a:latin typeface="Amiri" pitchFamily="2" charset="-78"/>
+                <a:ea typeface="Amiri" pitchFamily="2" charset="-78"/>
                 <a:cs typeface="Amiri" pitchFamily="2" charset="-78"/>
               </a:rPr>
               <a:t>كَانَ جَدِّي … أَمَّا اليَوْمَ فَأَحْضُرُ …</a:t>
@@ -6685,6 +6754,7 @@
                   <a:srgbClr val="1B3B6F"/>
                 </a:solidFill>
                 <a:latin typeface="Amiri" pitchFamily="2" charset="-78"/>
+                <a:ea typeface="Amiri" pitchFamily="2" charset="-78"/>
                 <a:cs typeface="Amiri" pitchFamily="2" charset="-78"/>
               </a:rPr>
               <a:t>كَيْفَ كَانَ التَّعْلِيمُ فِي زَمَنِ أَجْدَادِكَ؟</a:t>
@@ -6788,6 +6858,7 @@
                   <a:srgbClr val="1B3B6F"/>
                 </a:solidFill>
                 <a:latin typeface="Amiri" pitchFamily="2" charset="-78"/>
+                <a:ea typeface="Amiri" pitchFamily="2" charset="-78"/>
                 <a:cs typeface="Amiri" pitchFamily="2" charset="-78"/>
               </a:rPr>
               <a:t>لَوْ كُنْتُ وَزِيرًا، لَجَعَلْتُ …</a:t>
@@ -6864,6 +6935,7 @@
                   <a:srgbClr val="1B3B6F"/>
                 </a:solidFill>
                 <a:latin typeface="Amiri" pitchFamily="2" charset="-78"/>
+                <a:ea typeface="Amiri" pitchFamily="2" charset="-78"/>
                 <a:cs typeface="Amiri" pitchFamily="2" charset="-78"/>
               </a:rPr>
               <a:t>لَوْ كُنْتَ وَزِيرَ التَّعْلِيمِ، مَاذَا تُغَيِّرُ؟</a:t>
@@ -7073,6 +7145,7 @@
                   <a:srgbClr val="D4AF37"/>
                 </a:solidFill>
                 <a:latin typeface="Amiri" pitchFamily="2" charset="-78"/>
+                <a:ea typeface="Amiri" pitchFamily="2" charset="-78"/>
                 <a:cs typeface="Amiri" pitchFamily="2" charset="-78"/>
               </a:rPr>
               <a:t>م</a:t>
@@ -7393,6 +7466,7 @@
                   <a:srgbClr val="8A6D1E"/>
                 </a:solidFill>
                 <a:latin typeface="Amiri" pitchFamily="2" charset="-78"/>
+                <a:ea typeface="Amiri" pitchFamily="2" charset="-78"/>
                 <a:cs typeface="Amiri" pitchFamily="2" charset="-78"/>
               </a:rPr>
               <a:t>وَرَقَةُ المُلَاحِظِ</a:t>
@@ -8863,6 +8937,7 @@
                   <a:srgbClr val="D4AF37"/>
                 </a:solidFill>
                 <a:latin typeface="Amiri" pitchFamily="2" charset="-78"/>
+                <a:ea typeface="Amiri" pitchFamily="2" charset="-78"/>
                 <a:cs typeface="Amiri" pitchFamily="2" charset="-78"/>
               </a:rPr>
               <a:t>م</a:t>
@@ -9183,6 +9258,7 @@
                   <a:srgbClr val="8A6D1E"/>
                 </a:solidFill>
                 <a:latin typeface="Amiri" pitchFamily="2" charset="-78"/>
+                <a:ea typeface="Amiri" pitchFamily="2" charset="-78"/>
                 <a:cs typeface="Amiri" pitchFamily="2" charset="-78"/>
               </a:rPr>
               <a:t>نَمُوذَجُ الإِجَابَةِ</a:t>
@@ -9425,6 +9501,7 @@
                   <a:srgbClr val="1B3B6F"/>
                 </a:solidFill>
                 <a:latin typeface="Amiri" pitchFamily="2" charset="-78"/>
+                <a:ea typeface="Amiri" pitchFamily="2" charset="-78"/>
                 <a:cs typeface="Amiri" pitchFamily="2" charset="-78"/>
               </a:rPr>
               <a:t>أَنَا فِي الصَّفِّ العَاشِرِ.</a:t>
@@ -9501,6 +9578,7 @@
                   <a:srgbClr val="1B3B6F"/>
                 </a:solidFill>
                 <a:latin typeface="Amiri" pitchFamily="2" charset="-78"/>
+                <a:ea typeface="Amiri" pitchFamily="2" charset="-78"/>
                 <a:cs typeface="Amiri" pitchFamily="2" charset="-78"/>
               </a:rPr>
               <a:t>أَهْلًا! فِي أَيِّ صَفٍّ أَنْتَ؟</a:t>
@@ -9604,6 +9682,7 @@
                   <a:srgbClr val="1B3B6F"/>
                 </a:solidFill>
                 <a:latin typeface="Amiri" pitchFamily="2" charset="-78"/>
+                <a:ea typeface="Amiri" pitchFamily="2" charset="-78"/>
                 <a:cs typeface="Amiri" pitchFamily="2" charset="-78"/>
               </a:rPr>
               <a:t>دَرَسْتُ فِي مَدْرَسَةٍ حُكُومِيَّةٍ صَغِيرَةٍ.</a:t>
@@ -9680,6 +9759,7 @@
                   <a:srgbClr val="1B3B6F"/>
                 </a:solidFill>
                 <a:latin typeface="Amiri" pitchFamily="2" charset="-78"/>
+                <a:ea typeface="Amiri" pitchFamily="2" charset="-78"/>
                 <a:cs typeface="Amiri" pitchFamily="2" charset="-78"/>
               </a:rPr>
               <a:t>وَأَيْنَ دَرَسْتَ قَبْلَ ذٰلِكَ؟</a:t>
@@ -9783,6 +9863,7 @@
                   <a:srgbClr val="1B3B6F"/>
                 </a:solidFill>
                 <a:latin typeface="Amiri" pitchFamily="2" charset="-78"/>
+                <a:ea typeface="Amiri" pitchFamily="2" charset="-78"/>
                 <a:cs typeface="Amiri" pitchFamily="2" charset="-78"/>
               </a:rPr>
               <a:t>كَمْ طَالِبًا فِي المَدْرَسَةِ؟</a:t>
@@ -9859,6 +9940,7 @@
                   <a:srgbClr val="1B3B6F"/>
                 </a:solidFill>
                 <a:latin typeface="Amiri" pitchFamily="2" charset="-78"/>
+                <a:ea typeface="Amiri" pitchFamily="2" charset="-78"/>
                 <a:cs typeface="Amiri" pitchFamily="2" charset="-78"/>
               </a:rPr>
               <a:t>مَدْرَسَتُنَا كَبِيرَةٌ.</a:t>
@@ -9962,6 +10044,7 @@
                   <a:srgbClr val="1B3B6F"/>
                 </a:solidFill>
                 <a:latin typeface="Amiri" pitchFamily="2" charset="-78"/>
+                <a:ea typeface="Amiri" pitchFamily="2" charset="-78"/>
                 <a:cs typeface="Amiri" pitchFamily="2" charset="-78"/>
               </a:rPr>
               <a:t>هِيَ أَكْبَرُ مِنْ مَدْرَسَتِي القَدِيمَةِ بِكَثِيرٍ.</a:t>
@@ -10038,6 +10121,7 @@
                   <a:srgbClr val="1B3B6F"/>
                 </a:solidFill>
                 <a:latin typeface="Amiri" pitchFamily="2" charset="-78"/>
+                <a:ea typeface="Amiri" pitchFamily="2" charset="-78"/>
                 <a:cs typeface="Amiri" pitchFamily="2" charset="-78"/>
               </a:rPr>
               <a:t>أَلْفُ طَالِبٍ وَطَالِبَةٍ.</a:t>
@@ -10141,6 +10225,7 @@
                   <a:srgbClr val="1B3B6F"/>
                 </a:solidFill>
                 <a:latin typeface="Amiri" pitchFamily="2" charset="-78"/>
+                <a:ea typeface="Amiri" pitchFamily="2" charset="-78"/>
                 <a:cs typeface="Amiri" pitchFamily="2" charset="-78"/>
               </a:rPr>
               <a:t>نَعَمْ، لِأَنَّهُ مُرِيحٌ وَجَمِيلٌ.</a:t>
@@ -10217,6 +10302,7 @@
                   <a:srgbClr val="1B3B6F"/>
                 </a:solidFill>
                 <a:latin typeface="Amiri" pitchFamily="2" charset="-78"/>
+                <a:ea typeface="Amiri" pitchFamily="2" charset="-78"/>
                 <a:cs typeface="Amiri" pitchFamily="2" charset="-78"/>
               </a:rPr>
               <a:t>هَلْ تُحِبُّ الزِّيَّ المَدْرَسِيَّ؟</a:t>
@@ -10426,6 +10512,7 @@
                   <a:srgbClr val="D4AF37"/>
                 </a:solidFill>
                 <a:latin typeface="Amiri" pitchFamily="2" charset="-78"/>
+                <a:ea typeface="Amiri" pitchFamily="2" charset="-78"/>
                 <a:cs typeface="Amiri" pitchFamily="2" charset="-78"/>
               </a:rPr>
               <a:t>م</a:t>
@@ -10746,6 +10833,7 @@
                   <a:srgbClr val="8A6D1E"/>
                 </a:solidFill>
                 <a:latin typeface="Amiri" pitchFamily="2" charset="-78"/>
+                <a:ea typeface="Amiri" pitchFamily="2" charset="-78"/>
                 <a:cs typeface="Amiri" pitchFamily="2" charset="-78"/>
               </a:rPr>
               <a:t>نَمُوذَجُ الإِجَابَةِ</a:t>
@@ -10988,6 +11076,7 @@
                   <a:srgbClr val="1B3B6F"/>
                 </a:solidFill>
                 <a:latin typeface="Amiri" pitchFamily="2" charset="-78"/>
+                <a:ea typeface="Amiri" pitchFamily="2" charset="-78"/>
                 <a:cs typeface="Amiri" pitchFamily="2" charset="-78"/>
               </a:rPr>
               <a:t>أُرِيدُ أَنْ أَدْرُسَ فِي كُلِّيَّةٍ قَرِيبَةٍ مِنْ بَيْتِي.</a:t>
@@ -11064,6 +11153,7 @@
                   <a:srgbClr val="1B3B6F"/>
                 </a:solidFill>
                 <a:latin typeface="Amiri" pitchFamily="2" charset="-78"/>
+                <a:ea typeface="Amiri" pitchFamily="2" charset="-78"/>
                 <a:cs typeface="Amiri" pitchFamily="2" charset="-78"/>
               </a:rPr>
               <a:t>مَاذَا تُرِيدُ أَنْ تَفْعَلَ بَعْدَ الصَّفِّ الحَادِي عَشَرَ؟</a:t>
@@ -11167,6 +11257,7 @@
                   <a:srgbClr val="1B3B6F"/>
                 </a:solidFill>
                 <a:latin typeface="Amiri" pitchFamily="2" charset="-78"/>
+                <a:ea typeface="Amiri" pitchFamily="2" charset="-78"/>
                 <a:cs typeface="Amiri" pitchFamily="2" charset="-78"/>
               </a:rPr>
               <a:t>لِأَنَّ الكُلِّيَّةَ فِيهَا مَوَادُّ أَكْثَرُ.</a:t>
@@ -11243,6 +11334,7 @@
                   <a:srgbClr val="1B3B6F"/>
                 </a:solidFill>
                 <a:latin typeface="Amiri" pitchFamily="2" charset="-78"/>
+                <a:ea typeface="Amiri" pitchFamily="2" charset="-78"/>
                 <a:cs typeface="Amiri" pitchFamily="2" charset="-78"/>
               </a:rPr>
               <a:t>لِمَاذَا لَا تَبْقَى فِي مَدْرَسَتِكَ؟</a:t>
@@ -11346,6 +11438,7 @@
                   <a:srgbClr val="1B3B6F"/>
                 </a:solidFill>
                 <a:latin typeface="Amiri" pitchFamily="2" charset="-78"/>
+                <a:ea typeface="Amiri" pitchFamily="2" charset="-78"/>
                 <a:cs typeface="Amiri" pitchFamily="2" charset="-78"/>
               </a:rPr>
               <a:t>مَا الفَرْقُ بَيْنَهُمَا؟ وَأَيُّهُمَا أَقْرَبُ؟</a:t>
@@ -11422,6 +11515,7 @@
                   <a:srgbClr val="1B3B6F"/>
                 </a:solidFill>
                 <a:latin typeface="Amiri" pitchFamily="2" charset="-78"/>
+                <a:ea typeface="Amiri" pitchFamily="2" charset="-78"/>
                 <a:cs typeface="Amiri" pitchFamily="2" charset="-78"/>
               </a:rPr>
               <a:t>هُنَاكَ كُلِّيَّتَانِ فِي المِنْطَقَةِ.</a:t>
@@ -11525,6 +11619,7 @@
                   <a:srgbClr val="1B3B6F"/>
                 </a:solidFill>
                 <a:latin typeface="Amiri" pitchFamily="2" charset="-78"/>
+                <a:ea typeface="Amiri" pitchFamily="2" charset="-78"/>
                 <a:cs typeface="Amiri" pitchFamily="2" charset="-78"/>
               </a:rPr>
               <a:t>أُفَضِّلُ الحُكُومِيَّةَ، لِأَنَّهَا مَجَّانِيَّةٌ، بَيْنَمَا الخَاصَّةُ غَالِيَةٌ جِدًّا.</a:t>
@@ -11601,6 +11696,7 @@
                   <a:srgbClr val="1B3B6F"/>
                 </a:solidFill>
                 <a:latin typeface="Amiri" pitchFamily="2" charset="-78"/>
+                <a:ea typeface="Amiri" pitchFamily="2" charset="-78"/>
                 <a:cs typeface="Amiri" pitchFamily="2" charset="-78"/>
               </a:rPr>
               <a:t>الأُولَى حُكُومِيَّةٌ وَمُخْتَلَطَةٌ، وَالثَّانِيَةُ خَاصَّةٌ لِلْبَنَاتِ.</a:t>
@@ -11704,6 +11800,7 @@
                   <a:srgbClr val="1B3B6F"/>
                 </a:solidFill>
                 <a:latin typeface="Amiri" pitchFamily="2" charset="-78"/>
+                <a:ea typeface="Amiri" pitchFamily="2" charset="-78"/>
                 <a:cs typeface="Amiri" pitchFamily="2" charset="-78"/>
               </a:rPr>
               <a:t>سَأَدْرُسُ الهَنْدَسَةَ فِي الجَامِعَةِ، إِنْ شَاءَ اللّٰهُ.</a:t>
@@ -11780,6 +11877,7 @@
                   <a:srgbClr val="1B3B6F"/>
                 </a:solidFill>
                 <a:latin typeface="Amiri" pitchFamily="2" charset="-78"/>
+                <a:ea typeface="Amiri" pitchFamily="2" charset="-78"/>
                 <a:cs typeface="Amiri" pitchFamily="2" charset="-78"/>
               </a:rPr>
               <a:t>وَمَاذَا بَعْدَ الكُلِّيَّةِ؟</a:t>
@@ -11989,6 +12087,7 @@
                   <a:srgbClr val="D4AF37"/>
                 </a:solidFill>
                 <a:latin typeface="Amiri" pitchFamily="2" charset="-78"/>
+                <a:ea typeface="Amiri" pitchFamily="2" charset="-78"/>
                 <a:cs typeface="Amiri" pitchFamily="2" charset="-78"/>
               </a:rPr>
               <a:t>م</a:t>
@@ -12309,6 +12408,7 @@
                   <a:srgbClr val="8A6D1E"/>
                 </a:solidFill>
                 <a:latin typeface="Amiri" pitchFamily="2" charset="-78"/>
+                <a:ea typeface="Amiri" pitchFamily="2" charset="-78"/>
                 <a:cs typeface="Amiri" pitchFamily="2" charset="-78"/>
               </a:rPr>
               <a:t>نَمُوذَجُ الإِجَابَةِ</a:t>
@@ -12551,6 +12651,7 @@
                   <a:srgbClr val="1B3B6F"/>
                 </a:solidFill>
                 <a:latin typeface="Amiri" pitchFamily="2" charset="-78"/>
+                <a:ea typeface="Amiri" pitchFamily="2" charset="-78"/>
                 <a:cs typeface="Amiri" pitchFamily="2" charset="-78"/>
               </a:rPr>
               <a:t>مَدْرَسَتِي ثَانَوِيَّةٌ مُخْتَلَطَةٌ، فِيهَا أَلْفُ طَالِبٍ، وَمُخْتَبَرَاتٌ حَدِيثَةٌ، وَمَلْعَبٌ كَبِيرٌ.</a:t>
@@ -12627,6 +12728,7 @@
                   <a:srgbClr val="1B3B6F"/>
                 </a:solidFill>
                 <a:latin typeface="Amiri" pitchFamily="2" charset="-78"/>
+                <a:ea typeface="Amiri" pitchFamily="2" charset="-78"/>
                 <a:cs typeface="Amiri" pitchFamily="2" charset="-78"/>
               </a:rPr>
               <a:t>صِفْ لِي مَدْرَسَتَكَ.</a:t>
@@ -12730,6 +12832,7 @@
                   <a:srgbClr val="1B3B6F"/>
                 </a:solidFill>
                 <a:latin typeface="Amiri" pitchFamily="2" charset="-78"/>
+                <a:ea typeface="Amiri" pitchFamily="2" charset="-78"/>
                 <a:cs typeface="Amiri" pitchFamily="2" charset="-78"/>
               </a:rPr>
               <a:t>أَمَّا نَحْنُ فَنَبْدَأُ فِي الثَّامِنَةِ وَالنِّصْفِ، بَيْنَمَا يَنْتَهِي يَوْمُنَا فِي الثَّالِثَةِ وَالنِّصْفِ.</a:t>
@@ -12806,6 +12909,7 @@
                   <a:srgbClr val="1B3B6F"/>
                 </a:solidFill>
                 <a:latin typeface="Amiri" pitchFamily="2" charset="-78"/>
+                <a:ea typeface="Amiri" pitchFamily="2" charset="-78"/>
                 <a:cs typeface="Amiri" pitchFamily="2" charset="-78"/>
               </a:rPr>
               <a:t>فِي الأُرْدُنِّ نَبْدَأُ الدِّرَاسَةَ فِي السَّابِعَةِ وَالنِّصْفِ.</a:t>
@@ -12909,6 +13013,7 @@
                   <a:srgbClr val="1B3B6F"/>
                 </a:solidFill>
                 <a:latin typeface="Amiri" pitchFamily="2" charset="-78"/>
+                <a:ea typeface="Amiri" pitchFamily="2" charset="-78"/>
                 <a:cs typeface="Amiri" pitchFamily="2" charset="-78"/>
               </a:rPr>
               <a:t>كَانَتْ صَغِيرَةً وَقَرِيبَةً مِنْ بَيْتِي، وَكُنَّا نَلْعَبُ فِي الحَدِيقَةِ كُلَّ يَوْمٍ.</a:t>
@@ -12985,6 +13090,7 @@
                   <a:srgbClr val="1B3B6F"/>
                 </a:solidFill>
                 <a:latin typeface="Amiri" pitchFamily="2" charset="-78"/>
+                <a:ea typeface="Amiri" pitchFamily="2" charset="-78"/>
                 <a:cs typeface="Amiri" pitchFamily="2" charset="-78"/>
               </a:rPr>
               <a:t>كَيْفَ كَانَتْ مَدْرَسَتُكَ الابْتِدَائِيَّةُ؟</a:t>
@@ -13088,6 +13194,7 @@
                   <a:srgbClr val="1B3B6F"/>
                 </a:solidFill>
                 <a:latin typeface="Amiri" pitchFamily="2" charset="-78"/>
+                <a:ea typeface="Amiri" pitchFamily="2" charset="-78"/>
                 <a:cs typeface="Amiri" pitchFamily="2" charset="-78"/>
               </a:rPr>
               <a:t>الثَّانَوِيَّةُ أَصْعَبُ بِكَثِيرٍ، لِأَنَّ المَوَادَّ أَكْثَرُ، وَلِأَنَّ عِنْدَنَا امْتِحَانَاتٍ مُهِمَّةً.</a:t>
@@ -13164,6 +13271,7 @@
                   <a:srgbClr val="1B3B6F"/>
                 </a:solidFill>
                 <a:latin typeface="Amiri" pitchFamily="2" charset="-78"/>
+                <a:ea typeface="Amiri" pitchFamily="2" charset="-78"/>
                 <a:cs typeface="Amiri" pitchFamily="2" charset="-78"/>
               </a:rPr>
               <a:t>أَيُّهُمَا أَصْعَبُ فِي رَأْيِكَ: الابْتِدَائِيَّةُ أَمِ الثَّانَوِيَّةُ؟</a:t>
@@ -13267,6 +13375,7 @@
                   <a:srgbClr val="1B3B6F"/>
                 </a:solidFill>
                 <a:latin typeface="Amiri" pitchFamily="2" charset="-78"/>
+                <a:ea typeface="Amiri" pitchFamily="2" charset="-78"/>
                 <a:cs typeface="Amiri" pitchFamily="2" charset="-78"/>
               </a:rPr>
               <a:t>نَعَمْ، إِذَا سَنَحَتْ لِي الفُرْصَةُ، فَسَأَدْرُسُ فِي جَامِعَةٍ أُرْدُنِّيَّةٍ لِأُحَسِّنَ لُغَتِي العَرَبِيَّةَ.</a:t>
@@ -13343,6 +13452,7 @@
                   <a:srgbClr val="1B3B6F"/>
                 </a:solidFill>
                 <a:latin typeface="Amiri" pitchFamily="2" charset="-78"/>
+                <a:ea typeface="Amiri" pitchFamily="2" charset="-78"/>
                 <a:cs typeface="Amiri" pitchFamily="2" charset="-78"/>
               </a:rPr>
               <a:t>هَلْ تُحِبُّ أَنْ تَدْرُسَ فِي الأُرْدُنِّ؟</a:t>
@@ -13552,6 +13662,7 @@
                   <a:srgbClr val="D4AF37"/>
                 </a:solidFill>
                 <a:latin typeface="Amiri" pitchFamily="2" charset="-78"/>
+                <a:ea typeface="Amiri" pitchFamily="2" charset="-78"/>
                 <a:cs typeface="Amiri" pitchFamily="2" charset="-78"/>
               </a:rPr>
               <a:t>م</a:t>
@@ -13872,6 +13983,7 @@
                   <a:srgbClr val="8A6D1E"/>
                 </a:solidFill>
                 <a:latin typeface="Amiri" pitchFamily="2" charset="-78"/>
+                <a:ea typeface="Amiri" pitchFamily="2" charset="-78"/>
                 <a:cs typeface="Amiri" pitchFamily="2" charset="-78"/>
               </a:rPr>
               <a:t>نَمُوذَجُ الإِجَابَةِ</a:t>
@@ -14114,6 +14226,7 @@
                   <a:srgbClr val="1B3B6F"/>
                 </a:solidFill>
                 <a:latin typeface="Amiri" pitchFamily="2" charset="-78"/>
+                <a:ea typeface="Amiri" pitchFamily="2" charset="-78"/>
                 <a:cs typeface="Amiri" pitchFamily="2" charset="-78"/>
               </a:rPr>
               <a:t>مِنْ نَاحِيَةٍ، الصُّفُوفُ فِي الخَاصَّةِ أَصْغَرُ، وَمِنْ نَاحِيَةٍ أُخْرَى، تَجْمَعُ الحُكُومِيَّةُ طُلَّابًا مِنْ كُلِّ الخَلْفِيَّاتِ.</a:t>
@@ -14190,6 +14303,7 @@
                   <a:srgbClr val="1B3B6F"/>
                 </a:solidFill>
                 <a:latin typeface="Amiri" pitchFamily="2" charset="-78"/>
+                <a:ea typeface="Amiri" pitchFamily="2" charset="-78"/>
                 <a:cs typeface="Amiri" pitchFamily="2" charset="-78"/>
               </a:rPr>
               <a:t>هَلِ المَدَارِسُ الخَاصَّةُ أَفْضَلُ مِنَ الحُكُومِيَّةِ؟</a:t>
@@ -14293,6 +14407,7 @@
                   <a:srgbClr val="1B3B6F"/>
                 </a:solidFill>
                 <a:latin typeface="Amiri" pitchFamily="2" charset="-78"/>
+                <a:ea typeface="Amiri" pitchFamily="2" charset="-78"/>
                 <a:cs typeface="Amiri" pitchFamily="2" charset="-78"/>
               </a:rPr>
               <a:t>نَعَمْ، انْتَقَلْتُ إِلَيْهَا قَبْلَ سَنَتَيْنِ، لِأَنَّهَا تُقَدِّمُ مَوَادَّ لَمْ تَكُنْ مُتَوَفِّرَةً فِي مَدِينَتِي، كَاللُّغَةِ العَرَبِيَّةِ.</a:t>
@@ -14369,6 +14484,7 @@
                   <a:srgbClr val="1B3B6F"/>
                 </a:solidFill>
                 <a:latin typeface="Amiri" pitchFamily="2" charset="-78"/>
+                <a:ea typeface="Amiri" pitchFamily="2" charset="-78"/>
                 <a:cs typeface="Amiri" pitchFamily="2" charset="-78"/>
               </a:rPr>
               <a:t>وَأَنْتَ تَدْرُسُ فِي مَدْرَسَةٍ إِلِكْتْرُونِيَّةٍ، أَلَيْسَ كَذٰلِكَ؟</a:t>
@@ -14472,6 +14588,7 @@
                   <a:srgbClr val="1B3B6F"/>
                 </a:solidFill>
                 <a:latin typeface="Amiri" pitchFamily="2" charset="-78"/>
+                <a:ea typeface="Amiri" pitchFamily="2" charset="-78"/>
                 <a:cs typeface="Amiri" pitchFamily="2" charset="-78"/>
               </a:rPr>
               <a:t>صَحِيحٌ أَنَّ الحَيَاةَ الاجْتِمَاعِيَّةَ أَصْعَبُ، غَيْرَ أَنِّي أَلْتَقِي زُمَلَائِي فِي الغُرَفِ الجَانِبِيَّةِ، وَأُمَارِسُ الرِّيَاضَةَ فِي نَادٍ مَحَلِّيٍّ.</a:t>
@@ -14548,6 +14665,7 @@
                   <a:srgbClr val="1B3B6F"/>
                 </a:solidFill>
                 <a:latin typeface="Amiri" pitchFamily="2" charset="-78"/>
+                <a:ea typeface="Amiri" pitchFamily="2" charset="-78"/>
                 <a:cs typeface="Amiri" pitchFamily="2" charset="-78"/>
               </a:rPr>
               <a:t>لٰكِنَّ الطُّلَّابَ يَحْتَاجُونَ إِلَى أَصْدِقَاءَ!</a:t>
@@ -14651,6 +14769,7 @@
                   <a:srgbClr val="1B3B6F"/>
                 </a:solidFill>
                 <a:latin typeface="Amiri" pitchFamily="2" charset="-78"/>
+                <a:ea typeface="Amiri" pitchFamily="2" charset="-78"/>
                 <a:cs typeface="Amiri" pitchFamily="2" charset="-78"/>
               </a:rPr>
               <a:t>كَانَ جَدِّي يَمْشِي سَاعَةً إِلَى مَدْرَسَةٍ فِيهَا صَفٌّ وَاحِدٌ، أَمَّا اليَوْمَ فَأَحْضُرُ دُرُوسِي وَأَنَا فِي غُرْفَتِي.</a:t>
@@ -14727,6 +14846,7 @@
                   <a:srgbClr val="1B3B6F"/>
                 </a:solidFill>
                 <a:latin typeface="Amiri" pitchFamily="2" charset="-78"/>
+                <a:ea typeface="Amiri" pitchFamily="2" charset="-78"/>
                 <a:cs typeface="Amiri" pitchFamily="2" charset="-78"/>
               </a:rPr>
               <a:t>كَيْفَ كَانَ التَّعْلِيمُ فِي زَمَنِ أَجْدَادِكَ؟</a:t>
@@ -14830,6 +14950,7 @@
                   <a:srgbClr val="1B3B6F"/>
                 </a:solidFill>
                 <a:latin typeface="Amiri" pitchFamily="2" charset="-78"/>
+                <a:ea typeface="Amiri" pitchFamily="2" charset="-78"/>
                 <a:cs typeface="Amiri" pitchFamily="2" charset="-78"/>
               </a:rPr>
               <a:t>لَوْ كُنْتُ وَزِيرَ التَّعْلِيمِ، لَجَعَلْتُ كُلَّ المَدَارِسِ تُقَدِّمُ دُرُوسًا إِلِكْتْرُونِيَّةً إِضَافِيَّةً، لِكَيْ يَخْتَارَ كُلُّ طَالِبٍ مَا يُنَاسِبُهُ.</a:t>
@@ -14906,6 +15027,7 @@
                   <a:srgbClr val="1B3B6F"/>
                 </a:solidFill>
                 <a:latin typeface="Amiri" pitchFamily="2" charset="-78"/>
+                <a:ea typeface="Amiri" pitchFamily="2" charset="-78"/>
                 <a:cs typeface="Amiri" pitchFamily="2" charset="-78"/>
               </a:rPr>
               <a:t>لَوْ كُنْتَ وَزِيرَ التَّعْلِيمِ، مَاذَا تُغَيِّرُ؟</a:t>
@@ -15115,6 +15237,7 @@
                   <a:srgbClr val="D4AF37"/>
                 </a:solidFill>
                 <a:latin typeface="Amiri" pitchFamily="2" charset="-78"/>
+                <a:ea typeface="Amiri" pitchFamily="2" charset="-78"/>
                 <a:cs typeface="Amiri" pitchFamily="2" charset="-78"/>
               </a:rPr>
               <a:t>م</a:t>
@@ -15435,6 +15558,7 @@
                   <a:srgbClr val="8A6D1E"/>
                 </a:solidFill>
                 <a:latin typeface="Amiri" pitchFamily="2" charset="-78"/>
+                <a:ea typeface="Amiri" pitchFamily="2" charset="-78"/>
                 <a:cs typeface="Amiri" pitchFamily="2" charset="-78"/>
               </a:rPr>
               <a:t>مَدْرَسَتِي</a:t>
@@ -15715,6 +15839,7 @@
                   <a:srgbClr val="1B3B6F"/>
                 </a:solidFill>
                 <a:latin typeface="Amiri" pitchFamily="2" charset="-78"/>
+                <a:ea typeface="Amiri" pitchFamily="2" charset="-78"/>
                 <a:cs typeface="Amiri" pitchFamily="2" charset="-78"/>
               </a:rPr>
               <a:t>اسْمُ مَدْرَسَتِي …</a:t>
@@ -15791,6 +15916,7 @@
                   <a:srgbClr val="1B3B6F"/>
                 </a:solidFill>
                 <a:latin typeface="Amiri" pitchFamily="2" charset="-78"/>
+                <a:ea typeface="Amiri" pitchFamily="2" charset="-78"/>
                 <a:cs typeface="Amiri" pitchFamily="2" charset="-78"/>
               </a:rPr>
               <a:t>مَا اسْمُ مَدْرَسَتِكَ؟</a:t>
@@ -15959,6 +16085,7 @@
                   <a:srgbClr val="1B3B6F"/>
                 </a:solidFill>
                 <a:latin typeface="Amiri" pitchFamily="2" charset="-78"/>
+                <a:ea typeface="Amiri" pitchFamily="2" charset="-78"/>
                 <a:cs typeface="Amiri" pitchFamily="2" charset="-78"/>
               </a:rPr>
               <a:t>مَدْرَسَتِي …</a:t>
@@ -16035,6 +16162,7 @@
                   <a:srgbClr val="1B3B6F"/>
                 </a:solidFill>
                 <a:latin typeface="Amiri" pitchFamily="2" charset="-78"/>
+                <a:ea typeface="Amiri" pitchFamily="2" charset="-78"/>
                 <a:cs typeface="Amiri" pitchFamily="2" charset="-78"/>
               </a:rPr>
               <a:t>هَلْ مَدْرَسَتُكَ حُكُومِيَّةٌ أَمْ خَاصَّةٌ؟</a:t>
@@ -16203,6 +16331,7 @@
                   <a:srgbClr val="1B3B6F"/>
                 </a:solidFill>
                 <a:latin typeface="Amiri" pitchFamily="2" charset="-78"/>
+                <a:ea typeface="Amiri" pitchFamily="2" charset="-78"/>
                 <a:cs typeface="Amiri" pitchFamily="2" charset="-78"/>
               </a:rPr>
               <a:t>أَنَا فِي الصَّفِّ …</a:t>
@@ -16279,6 +16408,7 @@
                   <a:srgbClr val="1B3B6F"/>
                 </a:solidFill>
                 <a:latin typeface="Amiri" pitchFamily="2" charset="-78"/>
+                <a:ea typeface="Amiri" pitchFamily="2" charset="-78"/>
                 <a:cs typeface="Amiri" pitchFamily="2" charset="-78"/>
               </a:rPr>
               <a:t>فِي أَيِّ صَفٍّ أَنْتَ؟</a:t>
@@ -16447,6 +16577,7 @@
                   <a:srgbClr val="1B3B6F"/>
                 </a:solidFill>
                 <a:latin typeface="Amiri" pitchFamily="2" charset="-78"/>
+                <a:ea typeface="Amiri" pitchFamily="2" charset="-78"/>
                 <a:cs typeface="Amiri" pitchFamily="2" charset="-78"/>
               </a:rPr>
               <a:t>فِي صَفِّي …</a:t>
@@ -16523,6 +16654,7 @@
                   <a:srgbClr val="1B3B6F"/>
                 </a:solidFill>
                 <a:latin typeface="Amiri" pitchFamily="2" charset="-78"/>
+                <a:ea typeface="Amiri" pitchFamily="2" charset="-78"/>
                 <a:cs typeface="Amiri" pitchFamily="2" charset="-78"/>
               </a:rPr>
               <a:t>كَمْ طَالِبًا فِي صَفِّكَ؟</a:t>
@@ -16691,6 +16823,7 @@
                   <a:srgbClr val="1B3B6F"/>
                 </a:solidFill>
                 <a:latin typeface="Amiri" pitchFamily="2" charset="-78"/>
+                <a:ea typeface="Amiri" pitchFamily="2" charset="-78"/>
                 <a:cs typeface="Amiri" pitchFamily="2" charset="-78"/>
               </a:rPr>
               <a:t>نَعَمْ، أُحِبُّهَا لِأَنَّ …</a:t>
@@ -16767,6 +16900,7 @@
                   <a:srgbClr val="1B3B6F"/>
                 </a:solidFill>
                 <a:latin typeface="Amiri" pitchFamily="2" charset="-78"/>
+                <a:ea typeface="Amiri" pitchFamily="2" charset="-78"/>
                 <a:cs typeface="Amiri" pitchFamily="2" charset="-78"/>
               </a:rPr>
               <a:t>هَلْ تُحِبُّ مَدْرَسَتَكَ؟</a:t>
@@ -16921,6 +17055,7 @@
                   <a:srgbClr val="1B3B6F"/>
                 </a:solidFill>
                 <a:latin typeface="Amiri" pitchFamily="2" charset="-78"/>
+                <a:ea typeface="Amiri" pitchFamily="2" charset="-78"/>
                 <a:cs typeface="Amiri" pitchFamily="2" charset="-78"/>
               </a:rPr>
               <a:t>عَفْوًا، هَلْ يُمْكِنُ أَنْ تُعِيدَ السُّؤَالَ؟</a:t>
@@ -17054,6 +17189,7 @@
                   <a:srgbClr val="D4AF37"/>
                 </a:solidFill>
                 <a:latin typeface="Amiri" pitchFamily="2" charset="-78"/>
+                <a:ea typeface="Amiri" pitchFamily="2" charset="-78"/>
                 <a:cs typeface="Amiri" pitchFamily="2" charset="-78"/>
               </a:rPr>
               <a:t>م</a:t>
@@ -17374,6 +17510,7 @@
                   <a:srgbClr val="8A6D1E"/>
                 </a:solidFill>
                 <a:latin typeface="Amiri" pitchFamily="2" charset="-78"/>
+                <a:ea typeface="Amiri" pitchFamily="2" charset="-78"/>
                 <a:cs typeface="Amiri" pitchFamily="2" charset="-78"/>
               </a:rPr>
               <a:t>رِحْلَتِي التَّعْلِيمِيَّةُ</a:t>
@@ -17654,6 +17791,7 @@
                   <a:srgbClr val="1B3B6F"/>
                 </a:solidFill>
                 <a:latin typeface="Amiri" pitchFamily="2" charset="-78"/>
+                <a:ea typeface="Amiri" pitchFamily="2" charset="-78"/>
                 <a:cs typeface="Amiri" pitchFamily="2" charset="-78"/>
               </a:rPr>
               <a:t>كَانَتْ مَدْرَسَتِي … وَكُنْتُ …</a:t>
@@ -17730,6 +17868,7 @@
                   <a:srgbClr val="1B3B6F"/>
                 </a:solidFill>
                 <a:latin typeface="Amiri" pitchFamily="2" charset="-78"/>
+                <a:ea typeface="Amiri" pitchFamily="2" charset="-78"/>
                 <a:cs typeface="Amiri" pitchFamily="2" charset="-78"/>
               </a:rPr>
               <a:t>صِفْ مَدْرَسَتَكَ الابْتِدَائِيَّةَ.</a:t>
@@ -17833,6 +17972,7 @@
                   <a:srgbClr val="1B3B6F"/>
                 </a:solidFill>
                 <a:latin typeface="Amiri" pitchFamily="2" charset="-78"/>
+                <a:ea typeface="Amiri" pitchFamily="2" charset="-78"/>
                 <a:cs typeface="Amiri" pitchFamily="2" charset="-78"/>
               </a:rPr>
               <a:t>فِي الابْتِدَائِيَّةِ … بَيْنَمَا فِي الثَّانَوِيَّةِ …</a:t>
@@ -17909,6 +18049,7 @@
                   <a:srgbClr val="1B3B6F"/>
                 </a:solidFill>
                 <a:latin typeface="Amiri" pitchFamily="2" charset="-78"/>
+                <a:ea typeface="Amiri" pitchFamily="2" charset="-78"/>
                 <a:cs typeface="Amiri" pitchFamily="2" charset="-78"/>
               </a:rPr>
               <a:t>مَا الفَرْقُ بَيْنَ المَرْحَلَةِ الابْتِدَائِيَّةِ وَالثَّانَوِيَّةِ؟</a:t>
@@ -18012,6 +18153,7 @@
                   <a:srgbClr val="1B3B6F"/>
                 </a:solidFill>
                 <a:latin typeface="Amiri" pitchFamily="2" charset="-78"/>
+                <a:ea typeface="Amiri" pitchFamily="2" charset="-78"/>
                 <a:cs typeface="Amiri" pitchFamily="2" charset="-78"/>
               </a:rPr>
               <a:t>أُفَضِّلُ … لِأَنَّ …</a:t>
@@ -18088,6 +18230,7 @@
                   <a:srgbClr val="1B3B6F"/>
                 </a:solidFill>
                 <a:latin typeface="Amiri" pitchFamily="2" charset="-78"/>
+                <a:ea typeface="Amiri" pitchFamily="2" charset="-78"/>
                 <a:cs typeface="Amiri" pitchFamily="2" charset="-78"/>
               </a:rPr>
               <a:t>هَلْ تُفَضِّلُ المَدَارِسَ المُخْتَلَطَةَ؟</a:t>
@@ -18191,6 +18334,7 @@
                   <a:srgbClr val="1B3B6F"/>
                 </a:solidFill>
                 <a:latin typeface="Amiri" pitchFamily="2" charset="-78"/>
+                <a:ea typeface="Amiri" pitchFamily="2" charset="-78"/>
                 <a:cs typeface="Amiri" pitchFamily="2" charset="-78"/>
               </a:rPr>
               <a:t>فِي بَرِيطَانْيَا … أَمَّا فِي مِصْرَ فَالمَدَارِسُ …</a:t>
@@ -18267,6 +18411,7 @@
                   <a:srgbClr val="1B3B6F"/>
                 </a:solidFill>
                 <a:latin typeface="Amiri" pitchFamily="2" charset="-78"/>
+                <a:ea typeface="Amiri" pitchFamily="2" charset="-78"/>
                 <a:cs typeface="Amiri" pitchFamily="2" charset="-78"/>
               </a:rPr>
               <a:t>قَارِنْ بَيْنَ التَّعْلِيمِ فِي بَرِيطَانْيَا وَفِي بَلَدٍ عَرَبِيٍّ.</a:t>
@@ -18370,6 +18515,7 @@
                   <a:srgbClr val="1B3B6F"/>
                 </a:solidFill>
                 <a:latin typeface="Amiri" pitchFamily="2" charset="-78"/>
+                <a:ea typeface="Amiri" pitchFamily="2" charset="-78"/>
                 <a:cs typeface="Amiri" pitchFamily="2" charset="-78"/>
               </a:rPr>
               <a:t>سَأَدْرُسُ فِي … لِأَنَّ …</a:t>
@@ -18446,6 +18592,7 @@
                   <a:srgbClr val="1B3B6F"/>
                 </a:solidFill>
                 <a:latin typeface="Amiri" pitchFamily="2" charset="-78"/>
+                <a:ea typeface="Amiri" pitchFamily="2" charset="-78"/>
                 <a:cs typeface="Amiri" pitchFamily="2" charset="-78"/>
               </a:rPr>
               <a:t>أَيْنَ سَتَدْرُسُ بَعْدَ المَدْرَسَةِ؟</a:t>
@@ -18655,6 +18802,7 @@
                   <a:srgbClr val="D4AF37"/>
                 </a:solidFill>
                 <a:latin typeface="Amiri" pitchFamily="2" charset="-78"/>
+                <a:ea typeface="Amiri" pitchFamily="2" charset="-78"/>
                 <a:cs typeface="Amiri" pitchFamily="2" charset="-78"/>
               </a:rPr>
               <a:t>م</a:t>
@@ -18975,6 +19123,7 @@
                   <a:srgbClr val="8A6D1E"/>
                 </a:solidFill>
                 <a:latin typeface="Amiri" pitchFamily="2" charset="-78"/>
+                <a:ea typeface="Amiri" pitchFamily="2" charset="-78"/>
                 <a:cs typeface="Amiri" pitchFamily="2" charset="-78"/>
               </a:rPr>
               <a:t>التَّعْلِيمُ وَالمُجْتَمَعُ</a:t>
@@ -19255,6 +19404,7 @@
                   <a:srgbClr val="1B3B6F"/>
                 </a:solidFill>
                 <a:latin typeface="Amiri" pitchFamily="2" charset="-78"/>
+                <a:ea typeface="Amiri" pitchFamily="2" charset="-78"/>
                 <a:cs typeface="Amiri" pitchFamily="2" charset="-78"/>
               </a:rPr>
               <a:t>أَرَى أَنَّ … لِأَنَّ …</a:t>
@@ -19331,6 +19481,7 @@
                   <a:srgbClr val="1B3B6F"/>
                 </a:solidFill>
                 <a:latin typeface="Amiri" pitchFamily="2" charset="-78"/>
+                <a:ea typeface="Amiri" pitchFamily="2" charset="-78"/>
                 <a:cs typeface="Amiri" pitchFamily="2" charset="-78"/>
               </a:rPr>
               <a:t>هَلْ يَجِبُ أَنْ يَكُونَ التَّعْلِيمُ الجَامِعِيُّ مَجَّانِيًّا؟</a:t>
@@ -19434,6 +19585,7 @@
                   <a:srgbClr val="1B3B6F"/>
                 </a:solidFill>
                 <a:latin typeface="Amiri" pitchFamily="2" charset="-78"/>
+                <a:ea typeface="Amiri" pitchFamily="2" charset="-78"/>
                 <a:cs typeface="Amiri" pitchFamily="2" charset="-78"/>
               </a:rPr>
               <a:t>مِنْ نَاحِيَةٍ … وَمِنْ نَاحِيَةٍ أُخْرَى …</a:t>
@@ -19510,6 +19662,7 @@
                   <a:srgbClr val="1B3B6F"/>
                 </a:solidFill>
                 <a:latin typeface="Amiri" pitchFamily="2" charset="-78"/>
+                <a:ea typeface="Amiri" pitchFamily="2" charset="-78"/>
                 <a:cs typeface="Amiri" pitchFamily="2" charset="-78"/>
               </a:rPr>
               <a:t>هَلِ المَدْرَسَةُ الإِلِكْتْرُونِيَّةُ مُسْتَقْبَلُ التَّعْلِيمِ؟</a:t>
@@ -19613,6 +19766,7 @@
                   <a:srgbClr val="1B3B6F"/>
                 </a:solidFill>
                 <a:latin typeface="Amiri" pitchFamily="2" charset="-78"/>
+                <a:ea typeface="Amiri" pitchFamily="2" charset="-78"/>
                 <a:cs typeface="Amiri" pitchFamily="2" charset="-78"/>
               </a:rPr>
               <a:t>صَحِيحٌ أَنَّ … غَيْرَ أَنَّ …</a:t>
@@ -19689,6 +19843,7 @@
                   <a:srgbClr val="1B3B6F"/>
                 </a:solidFill>
                 <a:latin typeface="Amiri" pitchFamily="2" charset="-78"/>
+                <a:ea typeface="Amiri" pitchFamily="2" charset="-78"/>
                 <a:cs typeface="Amiri" pitchFamily="2" charset="-78"/>
               </a:rPr>
               <a:t>هَلِ الزِّيُّ المَدْرَسِيُّ ضَرُورِيٌّ؟</a:t>
@@ -19792,6 +19947,7 @@
                   <a:srgbClr val="1B3B6F"/>
                 </a:solidFill>
                 <a:latin typeface="Amiri" pitchFamily="2" charset="-78"/>
+                <a:ea typeface="Amiri" pitchFamily="2" charset="-78"/>
                 <a:cs typeface="Amiri" pitchFamily="2" charset="-78"/>
               </a:rPr>
               <a:t>كَانَ المُعَلِّمُ … أَمَّا الآنَ فَنَسْتَخْدِمُ …</a:t>
@@ -19868,6 +20024,7 @@
                   <a:srgbClr val="1B3B6F"/>
                 </a:solidFill>
                 <a:latin typeface="Amiri" pitchFamily="2" charset="-78"/>
+                <a:ea typeface="Amiri" pitchFamily="2" charset="-78"/>
                 <a:cs typeface="Amiri" pitchFamily="2" charset="-78"/>
               </a:rPr>
               <a:t>كَيْفَ تَغَيَّرَتِ المَدَارِسُ مُنْذُ أَيَّامِ وَالِدَيْكَ؟</a:t>
@@ -19971,6 +20128,7 @@
                   <a:srgbClr val="1B3B6F"/>
                 </a:solidFill>
                 <a:latin typeface="Amiri" pitchFamily="2" charset="-78"/>
+                <a:ea typeface="Amiri" pitchFamily="2" charset="-78"/>
                 <a:cs typeface="Amiri" pitchFamily="2" charset="-78"/>
               </a:rPr>
               <a:t>لَوْ أَسَّسْتُ مَدْرَسَةً، لَجَعَلْتُهَا …</a:t>
@@ -20047,6 +20205,7 @@
                   <a:srgbClr val="1B3B6F"/>
                 </a:solidFill>
                 <a:latin typeface="Amiri" pitchFamily="2" charset="-78"/>
+                <a:ea typeface="Amiri" pitchFamily="2" charset="-78"/>
                 <a:cs typeface="Amiri" pitchFamily="2" charset="-78"/>
               </a:rPr>
               <a:t>لَوْ أَسَّسْتَ مَدْرَسَةً، كَيْفَ تَكُونُ؟</a:t>
@@ -20256,6 +20415,7 @@
                   <a:srgbClr val="D4AF37"/>
                 </a:solidFill>
                 <a:latin typeface="Amiri" pitchFamily="2" charset="-78"/>
+                <a:ea typeface="Amiri" pitchFamily="2" charset="-78"/>
                 <a:cs typeface="Amiri" pitchFamily="2" charset="-78"/>
               </a:rPr>
               <a:t>م</a:t>
@@ -20576,6 +20736,7 @@
                   <a:srgbClr val="8A6D1E"/>
                 </a:solidFill>
                 <a:latin typeface="Amiri" pitchFamily="2" charset="-78"/>
+                <a:ea typeface="Amiri" pitchFamily="2" charset="-78"/>
                 <a:cs typeface="Amiri" pitchFamily="2" charset="-78"/>
               </a:rPr>
               <a:t>آدَابُ الصَّفِّ</a:t>
@@ -22107,6 +22268,7 @@
                   <a:srgbClr val="D4AF37"/>
                 </a:solidFill>
                 <a:latin typeface="Amiri" pitchFamily="2" charset="-78"/>
+                <a:ea typeface="Amiri" pitchFamily="2" charset="-78"/>
                 <a:cs typeface="Amiri" pitchFamily="2" charset="-78"/>
               </a:rPr>
               <a:t>م</a:t>
@@ -22427,6 +22589,7 @@
                   <a:srgbClr val="8A6D1E"/>
                 </a:solidFill>
                 <a:latin typeface="Amiri" pitchFamily="2" charset="-78"/>
+                <a:ea typeface="Amiri" pitchFamily="2" charset="-78"/>
                 <a:cs typeface="Amiri" pitchFamily="2" charset="-78"/>
               </a:rPr>
               <a:t>نَمُوذَجُ الإِجَابَةِ</a:t>
@@ -22669,6 +22832,7 @@
                   <a:srgbClr val="1B3B6F"/>
                 </a:solidFill>
                 <a:latin typeface="Amiri" pitchFamily="2" charset="-78"/>
+                <a:ea typeface="Amiri" pitchFamily="2" charset="-78"/>
                 <a:cs typeface="Amiri" pitchFamily="2" charset="-78"/>
               </a:rPr>
               <a:t>اسْمُ مَدْرَسَتِي مَدْرَسَةُ المَدِينَةِ.</a:t>
@@ -22745,6 +22909,7 @@
                   <a:srgbClr val="1B3B6F"/>
                 </a:solidFill>
                 <a:latin typeface="Amiri" pitchFamily="2" charset="-78"/>
+                <a:ea typeface="Amiri" pitchFamily="2" charset="-78"/>
                 <a:cs typeface="Amiri" pitchFamily="2" charset="-78"/>
               </a:rPr>
               <a:t>مَا اسْمُ مَدْرَسَتِكَ؟</a:t>
@@ -22848,6 +23013,7 @@
                   <a:srgbClr val="1B3B6F"/>
                 </a:solidFill>
                 <a:latin typeface="Amiri" pitchFamily="2" charset="-78"/>
+                <a:ea typeface="Amiri" pitchFamily="2" charset="-78"/>
                 <a:cs typeface="Amiri" pitchFamily="2" charset="-78"/>
               </a:rPr>
               <a:t>مَدْرَسَتِي خَاصَّةٌ وَإِلِكْتْرُونِيَّةٌ.</a:t>
@@ -22924,6 +23090,7 @@
                   <a:srgbClr val="1B3B6F"/>
                 </a:solidFill>
                 <a:latin typeface="Amiri" pitchFamily="2" charset="-78"/>
+                <a:ea typeface="Amiri" pitchFamily="2" charset="-78"/>
                 <a:cs typeface="Amiri" pitchFamily="2" charset="-78"/>
               </a:rPr>
               <a:t>هَلْ مَدْرَسَتُكَ حُكُومِيَّةٌ أَمْ خَاصَّةٌ؟</a:t>
@@ -23027,6 +23194,7 @@
                   <a:srgbClr val="1B3B6F"/>
                 </a:solidFill>
                 <a:latin typeface="Amiri" pitchFamily="2" charset="-78"/>
+                <a:ea typeface="Amiri" pitchFamily="2" charset="-78"/>
                 <a:cs typeface="Amiri" pitchFamily="2" charset="-78"/>
               </a:rPr>
               <a:t>أَنَا فِي الصَّفِّ الحَادِي عَشَرَ.</a:t>
@@ -23103,6 +23271,7 @@
                   <a:srgbClr val="1B3B6F"/>
                 </a:solidFill>
                 <a:latin typeface="Amiri" pitchFamily="2" charset="-78"/>
+                <a:ea typeface="Amiri" pitchFamily="2" charset="-78"/>
                 <a:cs typeface="Amiri" pitchFamily="2" charset="-78"/>
               </a:rPr>
               <a:t>فِي أَيِّ صَفٍّ أَنْتَ؟</a:t>
@@ -23206,6 +23375,7 @@
                   <a:srgbClr val="1B3B6F"/>
                 </a:solidFill>
                 <a:latin typeface="Amiri" pitchFamily="2" charset="-78"/>
+                <a:ea typeface="Amiri" pitchFamily="2" charset="-78"/>
                 <a:cs typeface="Amiri" pitchFamily="2" charset="-78"/>
               </a:rPr>
               <a:t>فِي صَفِّي عِشْرُونَ طَالِبًا.</a:t>
@@ -23282,6 +23452,7 @@
                   <a:srgbClr val="1B3B6F"/>
                 </a:solidFill>
                 <a:latin typeface="Amiri" pitchFamily="2" charset="-78"/>
+                <a:ea typeface="Amiri" pitchFamily="2" charset="-78"/>
                 <a:cs typeface="Amiri" pitchFamily="2" charset="-78"/>
               </a:rPr>
               <a:t>كَمْ طَالِبًا فِي صَفِّكَ؟</a:t>
@@ -23385,6 +23556,7 @@
                   <a:srgbClr val="1B3B6F"/>
                 </a:solidFill>
                 <a:latin typeface="Amiri" pitchFamily="2" charset="-78"/>
+                <a:ea typeface="Amiri" pitchFamily="2" charset="-78"/>
                 <a:cs typeface="Amiri" pitchFamily="2" charset="-78"/>
               </a:rPr>
               <a:t>نَعَمْ، أُحِبُّهَا لِأَنَّ المُعَلِّمِينَ لُطَفَاءُ.</a:t>
@@ -23461,6 +23633,7 @@
                   <a:srgbClr val="1B3B6F"/>
                 </a:solidFill>
                 <a:latin typeface="Amiri" pitchFamily="2" charset="-78"/>
+                <a:ea typeface="Amiri" pitchFamily="2" charset="-78"/>
                 <a:cs typeface="Amiri" pitchFamily="2" charset="-78"/>
               </a:rPr>
               <a:t>هَلْ تُحِبُّ مَدْرَسَتَكَ؟</a:t>
@@ -23670,6 +23843,7 @@
                   <a:srgbClr val="D4AF37"/>
                 </a:solidFill>
                 <a:latin typeface="Amiri" pitchFamily="2" charset="-78"/>
+                <a:ea typeface="Amiri" pitchFamily="2" charset="-78"/>
                 <a:cs typeface="Amiri" pitchFamily="2" charset="-78"/>
               </a:rPr>
               <a:t>م</a:t>
@@ -23990,6 +24164,7 @@
                   <a:srgbClr val="8A6D1E"/>
                 </a:solidFill>
                 <a:latin typeface="Amiri" pitchFamily="2" charset="-78"/>
+                <a:ea typeface="Amiri" pitchFamily="2" charset="-78"/>
                 <a:cs typeface="Amiri" pitchFamily="2" charset="-78"/>
               </a:rPr>
               <a:t>نَمُوذَجُ الإِجَابَةِ</a:t>
@@ -24232,6 +24407,7 @@
                   <a:srgbClr val="1B3B6F"/>
                 </a:solidFill>
                 <a:latin typeface="Amiri" pitchFamily="2" charset="-78"/>
+                <a:ea typeface="Amiri" pitchFamily="2" charset="-78"/>
                 <a:cs typeface="Amiri" pitchFamily="2" charset="-78"/>
               </a:rPr>
               <a:t>كَانَتْ مَدْرَسَتِي الابْتِدَائِيَّةُ صَغِيرَةً وَهَادِئَةً، وَكُنْتُ أَمْشِي إِلَيْهَا مَعَ أُمِّي كُلَّ صَبَاحٍ.</a:t>
@@ -24308,6 +24484,7 @@
                   <a:srgbClr val="1B3B6F"/>
                 </a:solidFill>
                 <a:latin typeface="Amiri" pitchFamily="2" charset="-78"/>
+                <a:ea typeface="Amiri" pitchFamily="2" charset="-78"/>
                 <a:cs typeface="Amiri" pitchFamily="2" charset="-78"/>
               </a:rPr>
               <a:t>صِفْ مَدْرَسَتَكَ الابْتِدَائِيَّةَ.</a:t>
@@ -24411,6 +24588,7 @@
                   <a:srgbClr val="1B3B6F"/>
                 </a:solidFill>
                 <a:latin typeface="Amiri" pitchFamily="2" charset="-78"/>
+                <a:ea typeface="Amiri" pitchFamily="2" charset="-78"/>
                 <a:cs typeface="Amiri" pitchFamily="2" charset="-78"/>
               </a:rPr>
               <a:t>فِي الابْتِدَائِيَّةِ كَانَ عِنْدَنَا مُعَلِّمٌ وَاحِدٌ، بَيْنَمَا فِي الثَّانَوِيَّةِ لِكُلِّ مَادَّةٍ مُعَلِّمٌ مُخْتَلِفٌ.</a:t>
@@ -24490,6 +24668,7 @@
                   <a:srgbClr val="1B3B6F"/>
                 </a:solidFill>
                 <a:latin typeface="Amiri" pitchFamily="2" charset="-78"/>
+                <a:ea typeface="Amiri" pitchFamily="2" charset="-78"/>
                 <a:cs typeface="Amiri" pitchFamily="2" charset="-78"/>
               </a:rPr>
               <a:t>مَا الفَرْقُ بَيْنَ المَرْحَلَةِ الابْتِدَائِيَّةِ وَالثَّانَوِيَّةِ؟</a:t>
@@ -24593,6 +24772,7 @@
                   <a:srgbClr val="1B3B6F"/>
                 </a:solidFill>
                 <a:latin typeface="Amiri" pitchFamily="2" charset="-78"/>
+                <a:ea typeface="Amiri" pitchFamily="2" charset="-78"/>
                 <a:cs typeface="Amiri" pitchFamily="2" charset="-78"/>
               </a:rPr>
               <a:t>أُفَضِّلُ المَدَارِسَ المُخْتَلَطَةَ، لِأَنَّهَا تُشْبِهُ الحَيَاةَ الحَقِيقِيَّةَ وَالجَامِعَةَ.</a:t>
@@ -24669,6 +24849,7 @@
                   <a:srgbClr val="1B3B6F"/>
                 </a:solidFill>
                 <a:latin typeface="Amiri" pitchFamily="2" charset="-78"/>
+                <a:ea typeface="Amiri" pitchFamily="2" charset="-78"/>
                 <a:cs typeface="Amiri" pitchFamily="2" charset="-78"/>
               </a:rPr>
               <a:t>هَلْ تُفَضِّلُ المَدَارِسَ المُخْتَلَطَةَ؟</a:t>
@@ -24772,6 +24953,7 @@
                   <a:srgbClr val="1B3B6F"/>
                 </a:solidFill>
                 <a:latin typeface="Amiri" pitchFamily="2" charset="-78"/>
+                <a:ea typeface="Amiri" pitchFamily="2" charset="-78"/>
                 <a:cs typeface="Amiri" pitchFamily="2" charset="-78"/>
               </a:rPr>
               <a:t>فِي بَرِيطَانْيَا يَلْبَسُ الطُّلَّابُ زِيًّا مَدْرَسِيًّا، أَمَّا فِي مِصْرَ فَالمَدَارِسُ الحُكُومِيَّةُ أَكْبَرُ وَالصُّفُوفُ أَكْثَرُ ازْدِحَامًا.</a:t>
@@ -24851,6 +25033,7 @@
                   <a:srgbClr val="1B3B6F"/>
                 </a:solidFill>
                 <a:latin typeface="Amiri" pitchFamily="2" charset="-78"/>
+                <a:ea typeface="Amiri" pitchFamily="2" charset="-78"/>
                 <a:cs typeface="Amiri" pitchFamily="2" charset="-78"/>
               </a:rPr>
               <a:t>قَارِنْ بَيْنَ التَّعْلِيمِ فِي بَرِيطَانْيَا وَفِي بَلَدٍ عَرَبِيٍّ.</a:t>
@@ -24954,6 +25137,7 @@
                   <a:srgbClr val="1B3B6F"/>
                 </a:solidFill>
                 <a:latin typeface="Amiri" pitchFamily="2" charset="-78"/>
+                <a:ea typeface="Amiri" pitchFamily="2" charset="-78"/>
                 <a:cs typeface="Amiri" pitchFamily="2" charset="-78"/>
               </a:rPr>
               <a:t>سَأَدْرُسُ فِي جَامِعَةِ مَانْشِسْتَرَ، لِأَنَّ قِسْمَ الطِّبِّ فِيهَا مَشْهُورٌ.</a:t>
@@ -25030,6 +25214,7 @@
                   <a:srgbClr val="1B3B6F"/>
                 </a:solidFill>
                 <a:latin typeface="Amiri" pitchFamily="2" charset="-78"/>
+                <a:ea typeface="Amiri" pitchFamily="2" charset="-78"/>
                 <a:cs typeface="Amiri" pitchFamily="2" charset="-78"/>
               </a:rPr>
               <a:t>أَيْنَ سَتَدْرُسُ بَعْدَ المَدْرَسَةِ؟</a:t>
@@ -25239,6 +25424,7 @@
                   <a:srgbClr val="D4AF37"/>
                 </a:solidFill>
                 <a:latin typeface="Amiri" pitchFamily="2" charset="-78"/>
+                <a:ea typeface="Amiri" pitchFamily="2" charset="-78"/>
                 <a:cs typeface="Amiri" pitchFamily="2" charset="-78"/>
               </a:rPr>
               <a:t>م</a:t>
@@ -25559,6 +25745,7 @@
                   <a:srgbClr val="8A6D1E"/>
                 </a:solidFill>
                 <a:latin typeface="Amiri" pitchFamily="2" charset="-78"/>
+                <a:ea typeface="Amiri" pitchFamily="2" charset="-78"/>
                 <a:cs typeface="Amiri" pitchFamily="2" charset="-78"/>
               </a:rPr>
               <a:t>نَمُوذَجُ الإِجَابَةِ</a:t>
@@ -25801,6 +25988,7 @@
                   <a:srgbClr val="1B3B6F"/>
                 </a:solidFill>
                 <a:latin typeface="Amiri" pitchFamily="2" charset="-78"/>
+                <a:ea typeface="Amiri" pitchFamily="2" charset="-78"/>
                 <a:cs typeface="Amiri" pitchFamily="2" charset="-78"/>
               </a:rPr>
               <a:t>أَرَى أَنَّهُ يَجِبُ أَنْ يَكُونَ مَجَّانِيًّا، لِأَنَّ المَوَاهِبَ مَوْجُودَةٌ فِي كُلِّ الأُسَرِ، لَا فِي الغَنِيَّةِ فَقَطْ.</a:t>
@@ -25877,6 +26065,7 @@
                   <a:srgbClr val="1B3B6F"/>
                 </a:solidFill>
                 <a:latin typeface="Amiri" pitchFamily="2" charset="-78"/>
+                <a:ea typeface="Amiri" pitchFamily="2" charset="-78"/>
                 <a:cs typeface="Amiri" pitchFamily="2" charset="-78"/>
               </a:rPr>
               <a:t>هَلْ يَجِبُ أَنْ يَكُونَ التَّعْلِيمُ الجَامِعِيُّ مَجَّانِيًّا؟</a:t>
@@ -25980,6 +26169,7 @@
                   <a:srgbClr val="1B3B6F"/>
                 </a:solidFill>
                 <a:latin typeface="Amiri" pitchFamily="2" charset="-78"/>
+                <a:ea typeface="Amiri" pitchFamily="2" charset="-78"/>
                 <a:cs typeface="Amiri" pitchFamily="2" charset="-78"/>
               </a:rPr>
               <a:t>مِنْ نَاحِيَةٍ، تُتِيحُ التَّعَلُّمَ مِنْ أَيِّ مَكَانٍ، وَمِنْ نَاحِيَةٍ أُخْرَى، لَا تُنَاسِبُ كُلَّ طَالِبٍ، لِأَنَّ بَعْضَهُمْ يَحْتَاجُ إِلَى نِظَامٍ يَوْمِيٍّ.</a:t>
@@ -26056,6 +26246,7 @@
                   <a:srgbClr val="1B3B6F"/>
                 </a:solidFill>
                 <a:latin typeface="Amiri" pitchFamily="2" charset="-78"/>
+                <a:ea typeface="Amiri" pitchFamily="2" charset="-78"/>
                 <a:cs typeface="Amiri" pitchFamily="2" charset="-78"/>
               </a:rPr>
               <a:t>هَلِ المَدْرَسَةُ الإِلِكْتْرُونِيَّةُ مُسْتَقْبَلُ التَّعْلِيمِ؟</a:t>
@@ -26159,6 +26350,7 @@
                   <a:srgbClr val="1B3B6F"/>
                 </a:solidFill>
                 <a:latin typeface="Amiri" pitchFamily="2" charset="-78"/>
+                <a:ea typeface="Amiri" pitchFamily="2" charset="-78"/>
                 <a:cs typeface="Amiri" pitchFamily="2" charset="-78"/>
               </a:rPr>
               <a:t>صَحِيحٌ أَنَّهُ يُقَلِّلُ الفُرُوقَ بَيْنَ الطُّلَّابِ، غَيْرَ أَنَّهُ غَالٍ عَلَى بَعْضِ الأُسَرِ، وَلَا يَسْمَحُ بِالتَّعْبِيرِ عَنِ الشَّخْصِيَّةِ.</a:t>
@@ -26235,6 +26427,7 @@
                   <a:srgbClr val="1B3B6F"/>
                 </a:solidFill>
                 <a:latin typeface="Amiri" pitchFamily="2" charset="-78"/>
+                <a:ea typeface="Amiri" pitchFamily="2" charset="-78"/>
                 <a:cs typeface="Amiri" pitchFamily="2" charset="-78"/>
               </a:rPr>
               <a:t>هَلِ الزِّيُّ المَدْرَسِيُّ ضَرُورِيٌّ؟</a:t>
@@ -26444,6 +26637,7 @@
                   <a:srgbClr val="D4AF37"/>
                 </a:solidFill>
                 <a:latin typeface="Amiri" pitchFamily="2" charset="-78"/>
+                <a:ea typeface="Amiri" pitchFamily="2" charset="-78"/>
                 <a:cs typeface="Amiri" pitchFamily="2" charset="-78"/>
               </a:rPr>
               <a:t>م</a:t>
@@ -26764,6 +26958,7 @@
                   <a:srgbClr val="8A6D1E"/>
                 </a:solidFill>
                 <a:latin typeface="Amiri" pitchFamily="2" charset="-78"/>
+                <a:ea typeface="Amiri" pitchFamily="2" charset="-78"/>
                 <a:cs typeface="Amiri" pitchFamily="2" charset="-78"/>
               </a:rPr>
               <a:t>نَمُوذَجُ الإِجَابَةِ</a:t>
@@ -27006,6 +27201,7 @@
                   <a:srgbClr val="1B3B6F"/>
                 </a:solidFill>
                 <a:latin typeface="Amiri" pitchFamily="2" charset="-78"/>
+                <a:ea typeface="Amiri" pitchFamily="2" charset="-78"/>
                 <a:cs typeface="Amiri" pitchFamily="2" charset="-78"/>
               </a:rPr>
               <a:t>كَانَ المُعَلِّمُ يَكْتُبُ عَلَى السَّبُّورَةِ بِالطَّبَاشِيرِ، أَمَّا الآنَ فَنَسْتَخْدِمُ الشَّاشَاتِ الذَّكِيَّةَ وَالحَوَاسِيبَ فِي كُلِّ حِصَّةٍ.</a:t>
@@ -27082,6 +27278,7 @@
                   <a:srgbClr val="1B3B6F"/>
                 </a:solidFill>
                 <a:latin typeface="Amiri" pitchFamily="2" charset="-78"/>
+                <a:ea typeface="Amiri" pitchFamily="2" charset="-78"/>
                 <a:cs typeface="Amiri" pitchFamily="2" charset="-78"/>
               </a:rPr>
               <a:t>كَيْفَ تَغَيَّرَتِ المَدَارِسُ مُنْذُ أَيَّامِ وَالِدَيْكَ؟</a:t>
@@ -27185,6 +27382,7 @@
                   <a:srgbClr val="1B3B6F"/>
                 </a:solidFill>
                 <a:latin typeface="Amiri" pitchFamily="2" charset="-78"/>
+                <a:ea typeface="Amiri" pitchFamily="2" charset="-78"/>
                 <a:cs typeface="Amiri" pitchFamily="2" charset="-78"/>
               </a:rPr>
               <a:t>لَوْ أَسَّسْتُ مَدْرَسَةً، لَجَعَلْتُهَا مُخْتَلَطَةً وَصَغِيرَةً، فِيهَا حَدِيقَةٌ وَمُخْتَبَرٌ رَقْمِيٌّ، وَلَعَلَّمْتُ فِيهَا لُغَتَيْنِ مُنْذُ الرَّوْضَةِ.</a:t>
@@ -27261,6 +27459,7 @@
                   <a:srgbClr val="1B3B6F"/>
                 </a:solidFill>
                 <a:latin typeface="Amiri" pitchFamily="2" charset="-78"/>
+                <a:ea typeface="Amiri" pitchFamily="2" charset="-78"/>
                 <a:cs typeface="Amiri" pitchFamily="2" charset="-78"/>
               </a:rPr>
               <a:t>لَوْ أَسَّسْتَ مَدْرَسَةً، كَيْفَ تَكُونُ؟</a:t>
@@ -27470,6 +27669,7 @@
                   <a:srgbClr val="D4AF37"/>
                 </a:solidFill>
                 <a:latin typeface="Amiri" pitchFamily="2" charset="-78"/>
+                <a:ea typeface="Amiri" pitchFamily="2" charset="-78"/>
                 <a:cs typeface="Amiri" pitchFamily="2" charset="-78"/>
               </a:rPr>
               <a:t>م</a:t>
@@ -27790,6 +27990,7 @@
                   <a:srgbClr val="8A6D1E"/>
                 </a:solidFill>
                 <a:latin typeface="Amiri" pitchFamily="2" charset="-78"/>
+                <a:ea typeface="Amiri" pitchFamily="2" charset="-78"/>
                 <a:cs typeface="Amiri" pitchFamily="2" charset="-78"/>
               </a:rPr>
               <a:t>قَيِّمْ عَمَلَكَ</a:t>
@@ -29034,6 +29235,7 @@
                   <a:srgbClr val="FFFFFF"/>
                 </a:solidFill>
                 <a:latin typeface="Amiri" pitchFamily="2" charset="-78"/>
+                <a:ea typeface="Amiri" pitchFamily="2" charset="-78"/>
                 <a:cs typeface="Amiri" pitchFamily="2" charset="-78"/>
               </a:rPr>
               <a:t>أَحْسَنْتُمْ! إِلَى اللِّقَاءِ</a:t>
@@ -29186,6 +29388,7 @@
                   <a:srgbClr val="D4AF37"/>
                 </a:solidFill>
                 <a:latin typeface="Amiri" pitchFamily="2" charset="-78"/>
+                <a:ea typeface="Amiri" pitchFamily="2" charset="-78"/>
                 <a:cs typeface="Amiri" pitchFamily="2" charset="-78"/>
               </a:rPr>
               <a:t>وَرْشَةُ الكِتَابَةِ</a:t>
@@ -29319,6 +29522,7 @@
                   <a:srgbClr val="D4AF37"/>
                 </a:solidFill>
                 <a:latin typeface="Amiri" pitchFamily="2" charset="-78"/>
+                <a:ea typeface="Amiri" pitchFamily="2" charset="-78"/>
                 <a:cs typeface="Amiri" pitchFamily="2" charset="-78"/>
               </a:rPr>
               <a:t>م</a:t>
@@ -29639,6 +29843,7 @@
                   <a:srgbClr val="8A6D1E"/>
                 </a:solidFill>
                 <a:latin typeface="Amiri" pitchFamily="2" charset="-78"/>
+                <a:ea typeface="Amiri" pitchFamily="2" charset="-78"/>
                 <a:cs typeface="Amiri" pitchFamily="2" charset="-78"/>
               </a:rPr>
               <a:t>خَرِيطَةُ الوَرْشَةِ</a:t>
@@ -29953,6 +30158,7 @@
                   <a:srgbClr val="1B3B6F"/>
                 </a:solidFill>
                 <a:latin typeface="Amiri" pitchFamily="2" charset="-78"/>
+                <a:ea typeface="Amiri" pitchFamily="2" charset="-78"/>
                 <a:cs typeface="Amiri" pitchFamily="2" charset="-78"/>
               </a:rPr>
               <a:t>كَيْفَ</a:t>
@@ -30229,6 +30435,7 @@
                   <a:srgbClr val="1E6B52"/>
                 </a:solidFill>
                 <a:latin typeface="Amiri" pitchFamily="2" charset="-78"/>
+                <a:ea typeface="Amiri" pitchFamily="2" charset="-78"/>
                 <a:cs typeface="Amiri" pitchFamily="2" charset="-78"/>
               </a:rPr>
               <a:t>تَمْثِيلُ الدَّوْرِ</a:t>
@@ -30505,6 +30712,7 @@
                   <a:srgbClr val="8A6D1E"/>
                 </a:solidFill>
                 <a:latin typeface="Amiri" pitchFamily="2" charset="-78"/>
+                <a:ea typeface="Amiri" pitchFamily="2" charset="-78"/>
                 <a:cs typeface="Amiri" pitchFamily="2" charset="-78"/>
               </a:rPr>
               <a:t>النَّمُوذَجُ</a:t>
@@ -30781,6 +30989,7 @@
                   <a:srgbClr val="1E6B52"/>
                 </a:solidFill>
                 <a:latin typeface="Amiri" pitchFamily="2" charset="-78"/>
+                <a:ea typeface="Amiri" pitchFamily="2" charset="-78"/>
                 <a:cs typeface="Amiri" pitchFamily="2" charset="-78"/>
               </a:rPr>
               <a:t>المُحَادَثَةُ</a:t>
@@ -31057,6 +31266,7 @@
                   <a:srgbClr val="8A6D1E"/>
                 </a:solidFill>
                 <a:latin typeface="Amiri" pitchFamily="2" charset="-78"/>
+                <a:ea typeface="Amiri" pitchFamily="2" charset="-78"/>
                 <a:cs typeface="Amiri" pitchFamily="2" charset="-78"/>
               </a:rPr>
               <a:t>قَيِّمْ</a:t>
@@ -31300,6 +31510,7 @@
                   <a:srgbClr val="D4AF37"/>
                 </a:solidFill>
                 <a:latin typeface="Amiri" pitchFamily="2" charset="-78"/>
+                <a:ea typeface="Amiri" pitchFamily="2" charset="-78"/>
                 <a:cs typeface="Amiri" pitchFamily="2" charset="-78"/>
               </a:rPr>
               <a:t>م</a:t>
@@ -31620,6 +31831,7 @@
                   <a:srgbClr val="8A6D1E"/>
                 </a:solidFill>
                 <a:latin typeface="Amiri" pitchFamily="2" charset="-78"/>
+                <a:ea typeface="Amiri" pitchFamily="2" charset="-78"/>
                 <a:cs typeface="Amiri" pitchFamily="2" charset="-78"/>
               </a:rPr>
               <a:t>امْتِحَانُ التَّحَدُّثِ</a:t>
@@ -32244,6 +32456,7 @@
                   <a:srgbClr val="1B3B6F"/>
                 </a:solidFill>
                 <a:latin typeface="Amiri" pitchFamily="2" charset="-78"/>
+                <a:ea typeface="Amiri" pitchFamily="2" charset="-78"/>
                 <a:cs typeface="Amiri" pitchFamily="2" charset="-78"/>
               </a:rPr>
               <a:t>عَفْوًا، هَلْ يُمْكِنُ أَنْ تُعِيدَ السُّؤَالَ؟</a:t>
@@ -32343,6 +32556,7 @@
                   <a:srgbClr val="1B3B6F"/>
                 </a:solidFill>
                 <a:latin typeface="Amiri" pitchFamily="2" charset="-78"/>
+                <a:ea typeface="Amiri" pitchFamily="2" charset="-78"/>
                 <a:cs typeface="Amiri" pitchFamily="2" charset="-78"/>
               </a:rPr>
               <a:t>لَحْظَةً، دَعْنِي أُفَكِّرُ …</a:t>
@@ -32442,6 +32656,7 @@
                   <a:srgbClr val="1B3B6F"/>
                 </a:solidFill>
                 <a:latin typeface="Amiri" pitchFamily="2" charset="-78"/>
+                <a:ea typeface="Amiri" pitchFamily="2" charset="-78"/>
                 <a:cs typeface="Amiri" pitchFamily="2" charset="-78"/>
               </a:rPr>
               <a:t>أَقْصِدُ …</a:t>
@@ -32613,6 +32828,7 @@
                   <a:srgbClr val="D4AF37"/>
                 </a:solidFill>
                 <a:latin typeface="Amiri" pitchFamily="2" charset="-78"/>
+                <a:ea typeface="Amiri" pitchFamily="2" charset="-78"/>
                 <a:cs typeface="Amiri" pitchFamily="2" charset="-78"/>
               </a:rPr>
               <a:t>م</a:t>
@@ -32933,6 +33149,7 @@
                   <a:srgbClr val="8A6D1E"/>
                 </a:solidFill>
                 <a:latin typeface="Amiri" pitchFamily="2" charset="-78"/>
+                <a:ea typeface="Amiri" pitchFamily="2" charset="-78"/>
                 <a:cs typeface="Amiri" pitchFamily="2" charset="-78"/>
               </a:rPr>
               <a:t>المُؤَسَّسَاتُ التَّعْلِيمِيَّةُ</a:t>
@@ -33236,6 +33453,7 @@
                   <a:srgbClr val="1B3B6F"/>
                 </a:solidFill>
                 <a:latin typeface="Amiri" pitchFamily="2" charset="-78"/>
+                <a:ea typeface="Amiri" pitchFamily="2" charset="-78"/>
                 <a:cs typeface="Amiri" pitchFamily="2" charset="-78"/>
               </a:rPr>
               <a:t>مَدْرَسَةٌ</a:t>
@@ -33393,6 +33611,7 @@
                   <a:srgbClr val="1B3B6F"/>
                 </a:solidFill>
                 <a:latin typeface="Amiri" pitchFamily="2" charset="-78"/>
+                <a:ea typeface="Amiri" pitchFamily="2" charset="-78"/>
                 <a:cs typeface="Amiri" pitchFamily="2" charset="-78"/>
               </a:rPr>
               <a:t>مَدْرَسَةٌ خَاصَّةٌ</a:t>
@@ -33496,6 +33715,7 @@
                   <a:srgbClr val="1B3B6F"/>
                 </a:solidFill>
                 <a:latin typeface="Amiri" pitchFamily="2" charset="-78"/>
+                <a:ea typeface="Amiri" pitchFamily="2" charset="-78"/>
                 <a:cs typeface="Amiri" pitchFamily="2" charset="-78"/>
               </a:rPr>
               <a:t>مَدْرَسَةٌ حُكُومِيَّةٌ</a:t>
@@ -33599,6 +33819,7 @@
                   <a:srgbClr val="1B3B6F"/>
                 </a:solidFill>
                 <a:latin typeface="Amiri" pitchFamily="2" charset="-78"/>
+                <a:ea typeface="Amiri" pitchFamily="2" charset="-78"/>
                 <a:cs typeface="Amiri" pitchFamily="2" charset="-78"/>
               </a:rPr>
               <a:t>مَدَارِسُ</a:t>
@@ -33864,6 +34085,7 @@
                   <a:srgbClr val="1B3B6F"/>
                 </a:solidFill>
                 <a:latin typeface="Amiri" pitchFamily="2" charset="-78"/>
+                <a:ea typeface="Amiri" pitchFamily="2" charset="-78"/>
                 <a:cs typeface="Amiri" pitchFamily="2" charset="-78"/>
               </a:rPr>
               <a:t>رَوْضَةُ الأَطْفَالِ</a:t>
@@ -34021,6 +34243,7 @@
                   <a:srgbClr val="1B3B6F"/>
                 </a:solidFill>
                 <a:latin typeface="Amiri" pitchFamily="2" charset="-78"/>
+                <a:ea typeface="Amiri" pitchFamily="2" charset="-78"/>
                 <a:cs typeface="Amiri" pitchFamily="2" charset="-78"/>
               </a:rPr>
               <a:t>رِيَاضُ الأَطْفَالِ</a:t>
@@ -34286,6 +34509,7 @@
                   <a:srgbClr val="1B3B6F"/>
                 </a:solidFill>
                 <a:latin typeface="Amiri" pitchFamily="2" charset="-78"/>
+                <a:ea typeface="Amiri" pitchFamily="2" charset="-78"/>
                 <a:cs typeface="Amiri" pitchFamily="2" charset="-78"/>
               </a:rPr>
               <a:t>المَرْحَلَةُ الابْتِدَائِيَّةُ</a:t>
@@ -34443,6 +34667,7 @@
                   <a:srgbClr val="1B3B6F"/>
                 </a:solidFill>
                 <a:latin typeface="Amiri" pitchFamily="2" charset="-78"/>
+                <a:ea typeface="Amiri" pitchFamily="2" charset="-78"/>
                 <a:cs typeface="Amiri" pitchFamily="2" charset="-78"/>
               </a:rPr>
               <a:t>المَرَاحِلُ</a:t>
@@ -34546,6 +34771,7 @@
                   <a:srgbClr val="1B3B6F"/>
                 </a:solidFill>
                 <a:latin typeface="Amiri" pitchFamily="2" charset="-78"/>
+                <a:ea typeface="Amiri" pitchFamily="2" charset="-78"/>
                 <a:cs typeface="Amiri" pitchFamily="2" charset="-78"/>
               </a:rPr>
               <a:t>الثَّانَوِيَّةُ</a:t>
@@ -34811,6 +35037,7 @@
                   <a:srgbClr val="1B3B6F"/>
                 </a:solidFill>
                 <a:latin typeface="Amiri" pitchFamily="2" charset="-78"/>
+                <a:ea typeface="Amiri" pitchFamily="2" charset="-78"/>
                 <a:cs typeface="Amiri" pitchFamily="2" charset="-78"/>
               </a:rPr>
               <a:t>جَامِعَةٌ</a:t>
@@ -34968,6 +35195,7 @@
                   <a:srgbClr val="1B3B6F"/>
                 </a:solidFill>
                 <a:latin typeface="Amiri" pitchFamily="2" charset="-78"/>
+                <a:ea typeface="Amiri" pitchFamily="2" charset="-78"/>
                 <a:cs typeface="Amiri" pitchFamily="2" charset="-78"/>
               </a:rPr>
               <a:t>جَامِعِيٌّ · جَامِعِيَّةٌ</a:t>
@@ -35071,6 +35299,7 @@
                   <a:srgbClr val="1B3B6F"/>
                 </a:solidFill>
                 <a:latin typeface="Amiri" pitchFamily="2" charset="-78"/>
+                <a:ea typeface="Amiri" pitchFamily="2" charset="-78"/>
                 <a:cs typeface="Amiri" pitchFamily="2" charset="-78"/>
               </a:rPr>
               <a:t>جَامِعَاتٌ</a:t>
@@ -35336,6 +35565,7 @@
                   <a:srgbClr val="1B3B6F"/>
                 </a:solidFill>
                 <a:latin typeface="Amiri" pitchFamily="2" charset="-78"/>
+                <a:ea typeface="Amiri" pitchFamily="2" charset="-78"/>
                 <a:cs typeface="Amiri" pitchFamily="2" charset="-78"/>
               </a:rPr>
               <a:t>كُلِّيَّةٌ · مَعْهَدٌ</a:t>
@@ -35493,6 +35723,7 @@
                   <a:srgbClr val="1B3B6F"/>
                 </a:solidFill>
                 <a:latin typeface="Amiri" pitchFamily="2" charset="-78"/>
+                <a:ea typeface="Amiri" pitchFamily="2" charset="-78"/>
                 <a:cs typeface="Amiri" pitchFamily="2" charset="-78"/>
               </a:rPr>
               <a:t>مَعْهَدٌ مِهْنِيٌّ</a:t>
@@ -35596,6 +35827,7 @@
                   <a:srgbClr val="1B3B6F"/>
                 </a:solidFill>
                 <a:latin typeface="Amiri" pitchFamily="2" charset="-78"/>
+                <a:ea typeface="Amiri" pitchFamily="2" charset="-78"/>
                 <a:cs typeface="Amiri" pitchFamily="2" charset="-78"/>
               </a:rPr>
               <a:t>كُلِّيَّاتٌ · مَعَاهِدُ</a:t>
@@ -35861,6 +36093,7 @@
                   <a:srgbClr val="1B3B6F"/>
                 </a:solidFill>
                 <a:latin typeface="Amiri" pitchFamily="2" charset="-78"/>
+                <a:ea typeface="Amiri" pitchFamily="2" charset="-78"/>
                 <a:cs typeface="Amiri" pitchFamily="2" charset="-78"/>
               </a:rPr>
               <a:t>طَالِبٌ</a:t>
@@ -36018,6 +36251,7 @@
                   <a:srgbClr val="1B3B6F"/>
                 </a:solidFill>
                 <a:latin typeface="Amiri" pitchFamily="2" charset="-78"/>
+                <a:ea typeface="Amiri" pitchFamily="2" charset="-78"/>
                 <a:cs typeface="Amiri" pitchFamily="2" charset="-78"/>
               </a:rPr>
               <a:t>طُلَّابٌ · طَالِبَاتٌ</a:t>
@@ -36121,6 +36355,7 @@
                   <a:srgbClr val="1B3B6F"/>
                 </a:solidFill>
                 <a:latin typeface="Amiri" pitchFamily="2" charset="-78"/>
+                <a:ea typeface="Amiri" pitchFamily="2" charset="-78"/>
                 <a:cs typeface="Amiri" pitchFamily="2" charset="-78"/>
               </a:rPr>
               <a:t>طَالِبَةٌ</a:t>
@@ -36254,6 +36489,7 @@
                   <a:srgbClr val="D4AF37"/>
                 </a:solidFill>
                 <a:latin typeface="Amiri" pitchFamily="2" charset="-78"/>
+                <a:ea typeface="Amiri" pitchFamily="2" charset="-78"/>
                 <a:cs typeface="Amiri" pitchFamily="2" charset="-78"/>
               </a:rPr>
               <a:t>م</a:t>
@@ -36574,6 +36810,7 @@
                   <a:srgbClr val="8A6D1E"/>
                 </a:solidFill>
                 <a:latin typeface="Amiri" pitchFamily="2" charset="-78"/>
+                <a:ea typeface="Amiri" pitchFamily="2" charset="-78"/>
                 <a:cs typeface="Amiri" pitchFamily="2" charset="-78"/>
               </a:rPr>
               <a:t>المُقَارَنَةُ</a:t>
@@ -36877,6 +37114,7 @@
                   <a:srgbClr val="1B3B6F"/>
                 </a:solidFill>
                 <a:latin typeface="Amiri" pitchFamily="2" charset="-78"/>
+                <a:ea typeface="Amiri" pitchFamily="2" charset="-78"/>
                 <a:cs typeface="Amiri" pitchFamily="2" charset="-78"/>
               </a:rPr>
               <a:t>مُعَلِّمٌ</a:t>
@@ -37034,6 +37272,7 @@
                   <a:srgbClr val="1B3B6F"/>
                 </a:solidFill>
                 <a:latin typeface="Amiri" pitchFamily="2" charset="-78"/>
+                <a:ea typeface="Amiri" pitchFamily="2" charset="-78"/>
                 <a:cs typeface="Amiri" pitchFamily="2" charset="-78"/>
               </a:rPr>
               <a:t>مُعَلِّمُونَ · مُعَلِّمَاتٌ</a:t>
@@ -37137,6 +37376,7 @@
                   <a:srgbClr val="1B3B6F"/>
                 </a:solidFill>
                 <a:latin typeface="Amiri" pitchFamily="2" charset="-78"/>
+                <a:ea typeface="Amiri" pitchFamily="2" charset="-78"/>
                 <a:cs typeface="Amiri" pitchFamily="2" charset="-78"/>
               </a:rPr>
               <a:t>مُعَلِّمَةٌ</a:t>
@@ -37402,6 +37642,7 @@
                   <a:srgbClr val="1B3B6F"/>
                 </a:solidFill>
                 <a:latin typeface="Amiri" pitchFamily="2" charset="-78"/>
+                <a:ea typeface="Amiri" pitchFamily="2" charset="-78"/>
                 <a:cs typeface="Amiri" pitchFamily="2" charset="-78"/>
               </a:rPr>
               <a:t>مُخْتَلَطٌ</a:t>
@@ -37559,6 +37800,7 @@
                   <a:srgbClr val="1B3B6F"/>
                 </a:solidFill>
                 <a:latin typeface="Amiri" pitchFamily="2" charset="-78"/>
+                <a:ea typeface="Amiri" pitchFamily="2" charset="-78"/>
                 <a:cs typeface="Amiri" pitchFamily="2" charset="-78"/>
               </a:rPr>
               <a:t>لِلْبَنِينَ · لِلْبَنَاتِ</a:t>
@@ -37662,6 +37904,7 @@
                   <a:srgbClr val="1B3B6F"/>
                 </a:solidFill>
                 <a:latin typeface="Amiri" pitchFamily="2" charset="-78"/>
+                <a:ea typeface="Amiri" pitchFamily="2" charset="-78"/>
                 <a:cs typeface="Amiri" pitchFamily="2" charset="-78"/>
               </a:rPr>
               <a:t>مُخْتَلَطَةٌ</a:t>
@@ -37927,6 +38170,7 @@
                   <a:srgbClr val="1B3B6F"/>
                 </a:solidFill>
                 <a:latin typeface="Amiri" pitchFamily="2" charset="-78"/>
+                <a:ea typeface="Amiri" pitchFamily="2" charset="-78"/>
                 <a:cs typeface="Amiri" pitchFamily="2" charset="-78"/>
               </a:rPr>
               <a:t>زِيٌّ مَدْرَسِيٌّ</a:t>
@@ -38084,6 +38328,7 @@
                   <a:srgbClr val="1B3B6F"/>
                 </a:solidFill>
                 <a:latin typeface="Amiri" pitchFamily="2" charset="-78"/>
+                <a:ea typeface="Amiri" pitchFamily="2" charset="-78"/>
                 <a:cs typeface="Amiri" pitchFamily="2" charset="-78"/>
               </a:rPr>
               <a:t>إِجْبَارِيٌّ</a:t>
@@ -38187,6 +38432,7 @@
                   <a:srgbClr val="1B3B6F"/>
                 </a:solidFill>
                 <a:latin typeface="Amiri" pitchFamily="2" charset="-78"/>
+                <a:ea typeface="Amiri" pitchFamily="2" charset="-78"/>
                 <a:cs typeface="Amiri" pitchFamily="2" charset="-78"/>
               </a:rPr>
               <a:t>أَزْيَاءٌ مَدْرَسِيَّةٌ</a:t>
@@ -38452,6 +38698,7 @@
                   <a:srgbClr val="1B3B6F"/>
                 </a:solidFill>
                 <a:latin typeface="Amiri" pitchFamily="2" charset="-78"/>
+                <a:ea typeface="Amiri" pitchFamily="2" charset="-78"/>
                 <a:cs typeface="Amiri" pitchFamily="2" charset="-78"/>
               </a:rPr>
               <a:t>إِلِكْتْرُونِيٌّ · عَنْ بُعْدٍ</a:t>
@@ -38609,6 +38856,7 @@
                   <a:srgbClr val="1B3B6F"/>
                 </a:solidFill>
                 <a:latin typeface="Amiri" pitchFamily="2" charset="-78"/>
+                <a:ea typeface="Amiri" pitchFamily="2" charset="-78"/>
                 <a:cs typeface="Amiri" pitchFamily="2" charset="-78"/>
               </a:rPr>
               <a:t>مَدْرَسَةٌ إِلِكْتْرُونِيَّةٌ</a:t>
@@ -38712,6 +38960,7 @@
                   <a:srgbClr val="1B3B6F"/>
                 </a:solidFill>
                 <a:latin typeface="Amiri" pitchFamily="2" charset="-78"/>
+                <a:ea typeface="Amiri" pitchFamily="2" charset="-78"/>
                 <a:cs typeface="Amiri" pitchFamily="2" charset="-78"/>
               </a:rPr>
               <a:t>إِلِكْتْرُونِيَّةٌ</a:t>
@@ -38977,6 +39226,7 @@
                   <a:srgbClr val="1B3B6F"/>
                 </a:solidFill>
                 <a:latin typeface="Amiri" pitchFamily="2" charset="-78"/>
+                <a:ea typeface="Amiri" pitchFamily="2" charset="-78"/>
                 <a:cs typeface="Amiri" pitchFamily="2" charset="-78"/>
               </a:rPr>
               <a:t>أَكْبَرُ مِنْ …</a:t>
@@ -39134,6 +39384,7 @@
                   <a:srgbClr val="1B3B6F"/>
                 </a:solidFill>
                 <a:latin typeface="Amiri" pitchFamily="2" charset="-78"/>
+                <a:ea typeface="Amiri" pitchFamily="2" charset="-78"/>
                 <a:cs typeface="Amiri" pitchFamily="2" charset="-78"/>
               </a:rPr>
               <a:t>أَغْلَى</a:t>
@@ -39237,6 +39488,7 @@
                   <a:srgbClr val="1B3B6F"/>
                 </a:solidFill>
                 <a:latin typeface="Amiri" pitchFamily="2" charset="-78"/>
+                <a:ea typeface="Amiri" pitchFamily="2" charset="-78"/>
                 <a:cs typeface="Amiri" pitchFamily="2" charset="-78"/>
               </a:rPr>
               <a:t>أَصْعَبُ</a:t>
@@ -39502,6 +39754,7 @@
                   <a:srgbClr val="1B3B6F"/>
                 </a:solidFill>
                 <a:latin typeface="Amiri" pitchFamily="2" charset="-78"/>
+                <a:ea typeface="Amiri" pitchFamily="2" charset="-78"/>
                 <a:cs typeface="Amiri" pitchFamily="2" charset="-78"/>
               </a:rPr>
               <a:t>بَيْنَمَا</a:t>
@@ -39659,6 +39912,7 @@
                   <a:srgbClr val="1B3B6F"/>
                 </a:solidFill>
                 <a:latin typeface="Amiri" pitchFamily="2" charset="-78"/>
+                <a:ea typeface="Amiri" pitchFamily="2" charset="-78"/>
                 <a:cs typeface="Amiri" pitchFamily="2" charset="-78"/>
               </a:rPr>
               <a:t>كِلْتَاهُمَا</a:t>
@@ -39762,6 +40016,7 @@
                   <a:srgbClr val="1B3B6F"/>
                 </a:solidFill>
                 <a:latin typeface="Amiri" pitchFamily="2" charset="-78"/>
+                <a:ea typeface="Amiri" pitchFamily="2" charset="-78"/>
                 <a:cs typeface="Amiri" pitchFamily="2" charset="-78"/>
               </a:rPr>
               <a:t>أَمَّا نَحْنُ فَنَبْدَأُ …</a:t>
@@ -39895,6 +40150,7 @@
                   <a:srgbClr val="D4AF37"/>
                 </a:solidFill>
                 <a:latin typeface="Amiri" pitchFamily="2" charset="-78"/>
+                <a:ea typeface="Amiri" pitchFamily="2" charset="-78"/>
                 <a:cs typeface="Amiri" pitchFamily="2" charset="-78"/>
               </a:rPr>
               <a:t>م</a:t>
@@ -40215,6 +40471,7 @@
                   <a:srgbClr val="8A6D1E"/>
                 </a:solidFill>
                 <a:latin typeface="Amiri" pitchFamily="2" charset="-78"/>
+                <a:ea typeface="Amiri" pitchFamily="2" charset="-78"/>
                 <a:cs typeface="Amiri" pitchFamily="2" charset="-78"/>
               </a:rPr>
               <a:t>فِي الغُرَفِ</a:t>
@@ -41391,6 +41648,7 @@
                   <a:srgbClr val="1B3B6F"/>
                 </a:solidFill>
                 <a:latin typeface="Amiri" pitchFamily="2" charset="-78"/>
+                <a:ea typeface="Amiri" pitchFamily="2" charset="-78"/>
                 <a:cs typeface="Amiri" pitchFamily="2" charset="-78"/>
               </a:rPr>
               <a:t>دَوْرُكَ!</a:t>
@@ -41467,6 +41725,7 @@
                   <a:srgbClr val="1B3B6F"/>
                 </a:solidFill>
                 <a:latin typeface="Amiri" pitchFamily="2" charset="-78"/>
+                <a:ea typeface="Amiri" pitchFamily="2" charset="-78"/>
                 <a:cs typeface="Amiri" pitchFamily="2" charset="-78"/>
               </a:rPr>
               <a:t>أَحْسَنْتَ! / أَحْسَنْتِ!</a:t>
@@ -41543,6 +41802,7 @@
                   <a:srgbClr val="1B3B6F"/>
                 </a:solidFill>
                 <a:latin typeface="Amiri" pitchFamily="2" charset="-78"/>
+                <a:ea typeface="Amiri" pitchFamily="2" charset="-78"/>
                 <a:cs typeface="Amiri" pitchFamily="2" charset="-78"/>
               </a:rPr>
               <a:t>تَكَلَّمْ أَكْثَرَ، مِنْ فَضْلِكَ</a:t>
@@ -41619,6 +41879,7 @@
                   <a:srgbClr val="1B3B6F"/>
                 </a:solidFill>
                 <a:latin typeface="Amiri" pitchFamily="2" charset="-78"/>
+                <a:ea typeface="Amiri" pitchFamily="2" charset="-78"/>
                 <a:cs typeface="Amiri" pitchFamily="2" charset="-78"/>
               </a:rPr>
               <a:t>لِمَاذَا؟</a:t>
@@ -41790,6 +42051,7 @@
                   <a:srgbClr val="D4AF37"/>
                 </a:solidFill>
                 <a:latin typeface="Amiri" pitchFamily="2" charset="-78"/>
+                <a:ea typeface="Amiri" pitchFamily="2" charset="-78"/>
                 <a:cs typeface="Amiri" pitchFamily="2" charset="-78"/>
               </a:rPr>
               <a:t>م</a:t>
@@ -42110,6 +42372,7 @@
                   <a:srgbClr val="8A6D1E"/>
                 </a:solidFill>
                 <a:latin typeface="Amiri" pitchFamily="2" charset="-78"/>
+                <a:ea typeface="Amiri" pitchFamily="2" charset="-78"/>
                 <a:cs typeface="Amiri" pitchFamily="2" charset="-78"/>
               </a:rPr>
               <a:t>يَوْمُ الأَبْوَابِ المَفْتُوحَةِ</a:t>
@@ -42390,6 +42653,7 @@
                   <a:srgbClr val="1B3B6F"/>
                 </a:solidFill>
                 <a:latin typeface="Amiri" pitchFamily="2" charset="-78"/>
+                <a:ea typeface="Amiri" pitchFamily="2" charset="-78"/>
                 <a:cs typeface="Amiri" pitchFamily="2" charset="-78"/>
               </a:rPr>
               <a:t>أَنَا فِي الصَّفِّ …</a:t>
@@ -42466,6 +42730,7 @@
                   <a:srgbClr val="1B3B6F"/>
                 </a:solidFill>
                 <a:latin typeface="Amiri" pitchFamily="2" charset="-78"/>
+                <a:ea typeface="Amiri" pitchFamily="2" charset="-78"/>
                 <a:cs typeface="Amiri" pitchFamily="2" charset="-78"/>
               </a:rPr>
               <a:t>أَهْلًا! فِي أَيِّ صَفٍّ أَنْتَ؟</a:t>
@@ -42634,6 +42899,7 @@
                   <a:srgbClr val="1B3B6F"/>
                 </a:solidFill>
                 <a:latin typeface="Amiri" pitchFamily="2" charset="-78"/>
+                <a:ea typeface="Amiri" pitchFamily="2" charset="-78"/>
                 <a:cs typeface="Amiri" pitchFamily="2" charset="-78"/>
               </a:rPr>
               <a:t>دَرَسْتُ فِي مَدْرَسَةٍ …</a:t>
@@ -42710,6 +42976,7 @@
                   <a:srgbClr val="1B3B6F"/>
                 </a:solidFill>
                 <a:latin typeface="Amiri" pitchFamily="2" charset="-78"/>
+                <a:ea typeface="Amiri" pitchFamily="2" charset="-78"/>
                 <a:cs typeface="Amiri" pitchFamily="2" charset="-78"/>
               </a:rPr>
               <a:t>وَأَيْنَ دَرَسْتَ قَبْلَ ذٰلِكَ؟</a:t>
@@ -42878,6 +43145,7 @@
                   <a:srgbClr val="1B3B6F"/>
                 </a:solidFill>
                 <a:latin typeface="Amiri" pitchFamily="2" charset="-78"/>
+                <a:ea typeface="Amiri" pitchFamily="2" charset="-78"/>
                 <a:cs typeface="Amiri" pitchFamily="2" charset="-78"/>
               </a:rPr>
               <a:t>كَمْ طَالِبًا …؟</a:t>
@@ -42954,6 +43222,7 @@
                   <a:srgbClr val="1B3B6F"/>
                 </a:solidFill>
                 <a:latin typeface="Amiri" pitchFamily="2" charset="-78"/>
+                <a:ea typeface="Amiri" pitchFamily="2" charset="-78"/>
                 <a:cs typeface="Amiri" pitchFamily="2" charset="-78"/>
               </a:rPr>
               <a:t>مَدْرَسَتُنَا كَبِيرَةٌ.</a:t>
@@ -43122,6 +43391,7 @@
                   <a:srgbClr val="1B3B6F"/>
                 </a:solidFill>
                 <a:latin typeface="Amiri" pitchFamily="2" charset="-78"/>
+                <a:ea typeface="Amiri" pitchFamily="2" charset="-78"/>
                 <a:cs typeface="Amiri" pitchFamily="2" charset="-78"/>
               </a:rPr>
               <a:t>هِيَ أَكْبَرُ مِنْ …</a:t>
@@ -43198,6 +43468,7 @@
                   <a:srgbClr val="1B3B6F"/>
                 </a:solidFill>
                 <a:latin typeface="Amiri" pitchFamily="2" charset="-78"/>
+                <a:ea typeface="Amiri" pitchFamily="2" charset="-78"/>
                 <a:cs typeface="Amiri" pitchFamily="2" charset="-78"/>
               </a:rPr>
               <a:t>أَلْفُ طَالِبٍ وَطَالِبَةٍ.</a:t>
@@ -43366,6 +43637,7 @@
                   <a:srgbClr val="1B3B6F"/>
                 </a:solidFill>
                 <a:latin typeface="Amiri" pitchFamily="2" charset="-78"/>
+                <a:ea typeface="Amiri" pitchFamily="2" charset="-78"/>
                 <a:cs typeface="Amiri" pitchFamily="2" charset="-78"/>
               </a:rPr>
               <a:t>نَعَمْ / لَا، لِأَنَّ …</a:t>
@@ -43442,6 +43714,7 @@
                   <a:srgbClr val="1B3B6F"/>
                 </a:solidFill>
                 <a:latin typeface="Amiri" pitchFamily="2" charset="-78"/>
+                <a:ea typeface="Amiri" pitchFamily="2" charset="-78"/>
                 <a:cs typeface="Amiri" pitchFamily="2" charset="-78"/>
               </a:rPr>
               <a:t>هَلْ تُحِبُّ الزِّيَّ المَدْرَسِيَّ؟</a:t>
@@ -43716,6 +43989,7 @@
                   <a:srgbClr val="D4AF37"/>
                 </a:solidFill>
                 <a:latin typeface="Amiri" pitchFamily="2" charset="-78"/>
+                <a:ea typeface="Amiri" pitchFamily="2" charset="-78"/>
                 <a:cs typeface="Amiri" pitchFamily="2" charset="-78"/>
               </a:rPr>
               <a:t>م</a:t>
@@ -44036,6 +44310,7 @@
                   <a:srgbClr val="8A6D1E"/>
                 </a:solidFill>
                 <a:latin typeface="Amiri" pitchFamily="2" charset="-78"/>
+                <a:ea typeface="Amiri" pitchFamily="2" charset="-78"/>
                 <a:cs typeface="Amiri" pitchFamily="2" charset="-78"/>
               </a:rPr>
               <a:t>اخْتِيَارُ كُلِّيَّةٍ</a:t>
@@ -44316,6 +44591,7 @@
                   <a:srgbClr val="1B3B6F"/>
                 </a:solidFill>
                 <a:latin typeface="Amiri" pitchFamily="2" charset="-78"/>
+                <a:ea typeface="Amiri" pitchFamily="2" charset="-78"/>
                 <a:cs typeface="Amiri" pitchFamily="2" charset="-78"/>
               </a:rPr>
               <a:t>أُرِيدُ أَنْ أَدْرُسَ فِي …</a:t>
@@ -44392,6 +44668,7 @@
                   <a:srgbClr val="1B3B6F"/>
                 </a:solidFill>
                 <a:latin typeface="Amiri" pitchFamily="2" charset="-78"/>
+                <a:ea typeface="Amiri" pitchFamily="2" charset="-78"/>
                 <a:cs typeface="Amiri" pitchFamily="2" charset="-78"/>
               </a:rPr>
               <a:t>مَاذَا تُرِيدُ أَنْ تَفْعَلَ بَعْدَ الصَّفِّ الحَادِي عَشَرَ؟</a:t>
@@ -44560,6 +44837,7 @@
                   <a:srgbClr val="1B3B6F"/>
                 </a:solidFill>
                 <a:latin typeface="Amiri" pitchFamily="2" charset="-78"/>
+                <a:ea typeface="Amiri" pitchFamily="2" charset="-78"/>
                 <a:cs typeface="Amiri" pitchFamily="2" charset="-78"/>
               </a:rPr>
               <a:t>لِأَنَّ الكُلِّيَّةَ …</a:t>
@@ -44636,6 +44914,7 @@
                   <a:srgbClr val="1B3B6F"/>
                 </a:solidFill>
                 <a:latin typeface="Amiri" pitchFamily="2" charset="-78"/>
+                <a:ea typeface="Amiri" pitchFamily="2" charset="-78"/>
                 <a:cs typeface="Amiri" pitchFamily="2" charset="-78"/>
               </a:rPr>
               <a:t>لِمَاذَا لَا تَبْقَى فِي مَدْرَسَتِكَ؟</a:t>
@@ -44804,6 +45083,7 @@
                   <a:srgbClr val="1B3B6F"/>
                 </a:solidFill>
                 <a:latin typeface="Amiri" pitchFamily="2" charset="-78"/>
+                <a:ea typeface="Amiri" pitchFamily="2" charset="-78"/>
                 <a:cs typeface="Amiri" pitchFamily="2" charset="-78"/>
               </a:rPr>
               <a:t>مَا الفَرْقُ بَيْنَهُمَا؟</a:t>
@@ -44880,6 +45160,7 @@
                   <a:srgbClr val="1B3B6F"/>
                 </a:solidFill>
                 <a:latin typeface="Amiri" pitchFamily="2" charset="-78"/>
+                <a:ea typeface="Amiri" pitchFamily="2" charset="-78"/>
                 <a:cs typeface="Amiri" pitchFamily="2" charset="-78"/>
               </a:rPr>
               <a:t>هُنَاكَ كُلِّيَّتَانِ فِي المِنْطَقَةِ.</a:t>
@@ -44983,6 +45264,7 @@
                   <a:srgbClr val="1B3B6F"/>
                 </a:solidFill>
                 <a:latin typeface="Amiri" pitchFamily="2" charset="-78"/>
+                <a:ea typeface="Amiri" pitchFamily="2" charset="-78"/>
                 <a:cs typeface="Amiri" pitchFamily="2" charset="-78"/>
               </a:rPr>
               <a:t>أُفَضِّلُ … لِأَنَّهَا … بَيْنَمَا …</a:t>
@@ -45059,6 +45341,7 @@
                   <a:srgbClr val="1B3B6F"/>
                 </a:solidFill>
                 <a:latin typeface="Amiri" pitchFamily="2" charset="-78"/>
+                <a:ea typeface="Amiri" pitchFamily="2" charset="-78"/>
                 <a:cs typeface="Amiri" pitchFamily="2" charset="-78"/>
               </a:rPr>
               <a:t>الأُولَى حُكُومِيَّةٌ وَمُخْتَلَطَةٌ، وَالثَّانِيَةُ خَاصَّةٌ لِلْبَنَاتِ.</a:t>
@@ -45162,6 +45445,7 @@
                   <a:srgbClr val="1B3B6F"/>
                 </a:solidFill>
                 <a:latin typeface="Amiri" pitchFamily="2" charset="-78"/>
+                <a:ea typeface="Amiri" pitchFamily="2" charset="-78"/>
                 <a:cs typeface="Amiri" pitchFamily="2" charset="-78"/>
               </a:rPr>
               <a:t>سَأَدْرُسُ … فِي الجَامِعَةِ</a:t>
@@ -45238,6 +45522,7 @@
                   <a:srgbClr val="1B3B6F"/>
                 </a:solidFill>
                 <a:latin typeface="Amiri" pitchFamily="2" charset="-78"/>
+                <a:ea typeface="Amiri" pitchFamily="2" charset="-78"/>
                 <a:cs typeface="Amiri" pitchFamily="2" charset="-78"/>
               </a:rPr>
               <a:t>وَمَاذَا بَعْدَ الكُلِّيَّةِ؟</a:t>
@@ -45412,13 +45697,9 @@
     <a:fontScheme name="Office">
       <a:majorFont>
         <a:latin typeface="Calibri Light" panose="020F0302020204030204"/>
-        <a:ea typeface=""/>
-        <a:cs typeface=""/>
-        <a:font script="Jpan" typeface="游ゴシック Light"/>
-        <a:font script="Hang" typeface="맑은 고딕"/>
-        <a:font script="Hans" typeface="等线 Light"/>
-        <a:font script="Hant" typeface="新細明體"/>
-        <a:font script="Arab" typeface="Times New Roman"/>
+        <a:ea typeface="Amiri" pitchFamily="2" charset="-78"/>
+        <a:cs typeface="Amiri" pitchFamily="2" charset="-78"/>
+        <a:font script="Arab" typeface="Amiri"/>
         <a:font script="Hebr" typeface="Times New Roman"/>
         <a:font script="Thai" typeface="Angsana New"/>
         <a:font script="Ethi" typeface="Nyala"/>
@@ -45464,13 +45745,9 @@
       </a:majorFont>
       <a:minorFont>
         <a:latin typeface="Calibri" panose="020F0502020204030204"/>
-        <a:ea typeface=""/>
-        <a:cs typeface=""/>
-        <a:font script="Jpan" typeface="游ゴシック"/>
-        <a:font script="Hang" typeface="맑은 고딕"/>
-        <a:font script="Hans" typeface="等线"/>
-        <a:font script="Hant" typeface="新細明體"/>
-        <a:font script="Arab" typeface="Arial"/>
+        <a:ea typeface="Amiri" pitchFamily="2" charset="-78"/>
+        <a:cs typeface="Amiri" pitchFamily="2" charset="-78"/>
+        <a:font script="Arab" typeface="Amiri"/>
         <a:font script="Hebr" typeface="Arial"/>
         <a:font script="Thai" typeface="Cordia New"/>
         <a:font script="Ethi" typeface="Nyala"/>
